--- a/企画書.pptx
+++ b/企画書.pptx
@@ -107,6 +107,11 @@
       </a:defRPr>
     </a:lvl9pPr>
   </p:defaultTextStyle>
+  <p:extLst>
+    <p:ext uri="{EFAFB233-063F-42B5-8137-9DF3F51BA10A}">
+      <p15:sldGuideLst xmlns:p15="http://schemas.microsoft.com/office/powerpoint/2012/main"/>
+    </p:ext>
+  </p:extLst>
 </p:presentation>
 </file>
 
@@ -3263,7 +3268,7 @@
         </p:nvSpPr>
         <p:spPr>
           <a:xfrm>
-            <a:off x="4471332" y="2634142"/>
+            <a:off x="4462786" y="2523047"/>
             <a:ext cx="2952925" cy="1200329"/>
           </a:xfrm>
           <a:prstGeom prst="rect">
@@ -3294,8 +3299,8 @@
         </p:nvSpPr>
         <p:spPr>
           <a:xfrm>
-            <a:off x="4563610" y="4278385"/>
-            <a:ext cx="2768367" cy="523220"/>
+            <a:off x="3812442" y="4022011"/>
+            <a:ext cx="4253612" cy="523220"/>
           </a:xfrm>
           <a:prstGeom prst="rect">
             <a:avLst/>
@@ -3310,7 +3315,15 @@
           <a:p>
             <a:r>
               <a:rPr kumimoji="1" lang="ja-JP" altLang="en-US" sz="2800" b="1" dirty="0" smtClean="0"/>
-              <a:t>タイトル、未定</a:t>
+              <a:t>タイトル</a:t>
+            </a:r>
+            <a:r>
+              <a:rPr lang="en-US" altLang="ja-JP" sz="2800" b="1" dirty="0" smtClean="0"/>
+              <a:t>:</a:t>
+            </a:r>
+            <a:r>
+              <a:rPr lang="en-US" altLang="ja-JP" sz="2800" b="1" dirty="0"/>
+              <a:t>alter emotions</a:t>
             </a:r>
             <a:endParaRPr kumimoji="1" lang="ja-JP" altLang="en-US" sz="2800" b="1" dirty="0"/>
           </a:p>
@@ -3668,7 +3681,6 @@
               <a:rPr lang="ja-JP" altLang="en-US" sz="4800" b="1" dirty="0"/>
               <a:t>概要</a:t>
             </a:r>
-            <a:endParaRPr lang="ja-JP" altLang="en-US" sz="4800" b="1" dirty="0"/>
           </a:p>
         </p:txBody>
       </p:sp>

--- a/企画書.pptx
+++ b/企画書.pptx
@@ -9,6 +9,9 @@
     <p:sldId id="258" r:id="rId3"/>
     <p:sldId id="259" r:id="rId4"/>
     <p:sldId id="260" r:id="rId5"/>
+    <p:sldId id="261" r:id="rId6"/>
+    <p:sldId id="262" r:id="rId7"/>
+    <p:sldId id="263" r:id="rId8"/>
   </p:sldIdLst>
   <p:sldSz cx="12192000" cy="6858000"/>
   <p:notesSz cx="6858000" cy="9144000"/>
@@ -246,7 +249,7 @@
           <a:p>
             <a:fld id="{6F6CF71D-B4D1-4CE1-9D45-0F127AB837F9}" type="datetimeFigureOut">
               <a:rPr kumimoji="1" lang="ja-JP" altLang="en-US" smtClean="0"/>
-              <a:t>2026/10/5</a:t>
+              <a:t>2026/10/15</a:t>
             </a:fld>
             <a:endParaRPr kumimoji="1" lang="ja-JP" altLang="en-US"/>
           </a:p>
@@ -448,7 +451,7 @@
           <a:p>
             <a:fld id="{6F6CF71D-B4D1-4CE1-9D45-0F127AB837F9}" type="datetimeFigureOut">
               <a:rPr kumimoji="1" lang="ja-JP" altLang="en-US" smtClean="0"/>
-              <a:t>2026/10/5</a:t>
+              <a:t>2026/10/15</a:t>
             </a:fld>
             <a:endParaRPr kumimoji="1" lang="ja-JP" altLang="en-US"/>
           </a:p>
@@ -660,7 +663,7 @@
           <a:p>
             <a:fld id="{6F6CF71D-B4D1-4CE1-9D45-0F127AB837F9}" type="datetimeFigureOut">
               <a:rPr kumimoji="1" lang="ja-JP" altLang="en-US" smtClean="0"/>
-              <a:t>2026/10/5</a:t>
+              <a:t>2026/10/15</a:t>
             </a:fld>
             <a:endParaRPr kumimoji="1" lang="ja-JP" altLang="en-US"/>
           </a:p>
@@ -862,7 +865,7 @@
           <a:p>
             <a:fld id="{6F6CF71D-B4D1-4CE1-9D45-0F127AB837F9}" type="datetimeFigureOut">
               <a:rPr kumimoji="1" lang="ja-JP" altLang="en-US" smtClean="0"/>
-              <a:t>2026/10/5</a:t>
+              <a:t>2026/10/15</a:t>
             </a:fld>
             <a:endParaRPr kumimoji="1" lang="ja-JP" altLang="en-US"/>
           </a:p>
@@ -1108,7 +1111,7 @@
           <a:p>
             <a:fld id="{6F6CF71D-B4D1-4CE1-9D45-0F127AB837F9}" type="datetimeFigureOut">
               <a:rPr kumimoji="1" lang="ja-JP" altLang="en-US" smtClean="0"/>
-              <a:t>2026/10/5</a:t>
+              <a:t>2026/10/15</a:t>
             </a:fld>
             <a:endParaRPr kumimoji="1" lang="ja-JP" altLang="en-US"/>
           </a:p>
@@ -1404,7 +1407,7 @@
           <a:p>
             <a:fld id="{6F6CF71D-B4D1-4CE1-9D45-0F127AB837F9}" type="datetimeFigureOut">
               <a:rPr kumimoji="1" lang="ja-JP" altLang="en-US" smtClean="0"/>
-              <a:t>2026/10/5</a:t>
+              <a:t>2026/10/15</a:t>
             </a:fld>
             <a:endParaRPr kumimoji="1" lang="ja-JP" altLang="en-US"/>
           </a:p>
@@ -1835,7 +1838,7 @@
           <a:p>
             <a:fld id="{6F6CF71D-B4D1-4CE1-9D45-0F127AB837F9}" type="datetimeFigureOut">
               <a:rPr kumimoji="1" lang="ja-JP" altLang="en-US" smtClean="0"/>
-              <a:t>2026/10/5</a:t>
+              <a:t>2026/10/15</a:t>
             </a:fld>
             <a:endParaRPr kumimoji="1" lang="ja-JP" altLang="en-US"/>
           </a:p>
@@ -1953,7 +1956,7 @@
           <a:p>
             <a:fld id="{6F6CF71D-B4D1-4CE1-9D45-0F127AB837F9}" type="datetimeFigureOut">
               <a:rPr kumimoji="1" lang="ja-JP" altLang="en-US" smtClean="0"/>
-              <a:t>2026/10/5</a:t>
+              <a:t>2026/10/15</a:t>
             </a:fld>
             <a:endParaRPr kumimoji="1" lang="ja-JP" altLang="en-US"/>
           </a:p>
@@ -2048,7 +2051,7 @@
           <a:p>
             <a:fld id="{6F6CF71D-B4D1-4CE1-9D45-0F127AB837F9}" type="datetimeFigureOut">
               <a:rPr kumimoji="1" lang="ja-JP" altLang="en-US" smtClean="0"/>
-              <a:t>2026/10/5</a:t>
+              <a:t>2026/10/15</a:t>
             </a:fld>
             <a:endParaRPr kumimoji="1" lang="ja-JP" altLang="en-US"/>
           </a:p>
@@ -2357,7 +2360,7 @@
           <a:p>
             <a:fld id="{6F6CF71D-B4D1-4CE1-9D45-0F127AB837F9}" type="datetimeFigureOut">
               <a:rPr kumimoji="1" lang="ja-JP" altLang="en-US" smtClean="0"/>
-              <a:t>2026/10/5</a:t>
+              <a:t>2026/10/15</a:t>
             </a:fld>
             <a:endParaRPr kumimoji="1" lang="ja-JP" altLang="en-US"/>
           </a:p>
@@ -2610,7 +2613,7 @@
           <a:p>
             <a:fld id="{6F6CF71D-B4D1-4CE1-9D45-0F127AB837F9}" type="datetimeFigureOut">
               <a:rPr kumimoji="1" lang="ja-JP" altLang="en-US" smtClean="0"/>
-              <a:t>2026/10/5</a:t>
+              <a:t>2026/10/15</a:t>
             </a:fld>
             <a:endParaRPr kumimoji="1" lang="ja-JP" altLang="en-US"/>
           </a:p>
@@ -2855,7 +2858,7 @@
           <a:p>
             <a:fld id="{6F6CF71D-B4D1-4CE1-9D45-0F127AB837F9}" type="datetimeFigureOut">
               <a:rPr kumimoji="1" lang="ja-JP" altLang="en-US" smtClean="0"/>
-              <a:t>2026/10/5</a:t>
+              <a:t>2026/10/15</a:t>
             </a:fld>
             <a:endParaRPr kumimoji="1" lang="ja-JP" altLang="en-US"/>
           </a:p>
@@ -3329,6 +3332,36 @@
           </a:p>
         </p:txBody>
       </p:sp>
+      <p:sp>
+        <p:nvSpPr>
+          <p:cNvPr id="4" name="テキスト ボックス 3"/>
+          <p:cNvSpPr txBox="1"/>
+          <p:nvPr/>
+        </p:nvSpPr>
+        <p:spPr>
+          <a:xfrm>
+            <a:off x="5444837" y="3837345"/>
+            <a:ext cx="2521527" cy="369332"/>
+          </a:xfrm>
+          <a:prstGeom prst="rect">
+            <a:avLst/>
+          </a:prstGeom>
+          <a:noFill/>
+        </p:spPr>
+        <p:txBody>
+          <a:bodyPr wrap="square" rtlCol="0">
+            <a:spAutoFit/>
+          </a:bodyPr>
+          <a:lstStyle/>
+          <a:p>
+            <a:r>
+              <a:rPr kumimoji="1" lang="ja-JP" altLang="en-US" dirty="0" smtClean="0"/>
+              <a:t>オルターエモーション</a:t>
+            </a:r>
+            <a:endParaRPr kumimoji="1" lang="ja-JP" altLang="en-US" dirty="0"/>
+          </a:p>
+        </p:txBody>
+      </p:sp>
     </p:spTree>
     <p:extLst>
       <p:ext uri="{BB962C8B-B14F-4D97-AF65-F5344CB8AC3E}">
@@ -3367,7 +3400,7 @@
         </p:nvSpPr>
         <p:spPr>
           <a:xfrm>
-            <a:off x="956343" y="1757094"/>
+            <a:off x="947954" y="1993241"/>
             <a:ext cx="4286775" cy="461665"/>
           </a:xfrm>
           <a:prstGeom prst="rect">
@@ -3401,7 +3434,7 @@
         </p:nvSpPr>
         <p:spPr>
           <a:xfrm>
-            <a:off x="623580" y="1193542"/>
+            <a:off x="667622" y="1416978"/>
             <a:ext cx="1339444" cy="400110"/>
           </a:xfrm>
           <a:prstGeom prst="rect">
@@ -3431,7 +3464,7 @@
         </p:nvSpPr>
         <p:spPr>
           <a:xfrm>
-            <a:off x="676011" y="2652445"/>
+            <a:off x="667622" y="2916571"/>
             <a:ext cx="1234581" cy="400110"/>
           </a:xfrm>
           <a:prstGeom prst="rect">
@@ -3461,7 +3494,7 @@
         </p:nvSpPr>
         <p:spPr>
           <a:xfrm>
-            <a:off x="956343" y="3277552"/>
+            <a:off x="947954" y="3547513"/>
             <a:ext cx="2290194" cy="461665"/>
           </a:xfrm>
           <a:prstGeom prst="rect">
@@ -3521,7 +3554,7 @@
         </p:nvSpPr>
         <p:spPr>
           <a:xfrm>
-            <a:off x="5134063" y="1182848"/>
+            <a:off x="5100507" y="1233182"/>
             <a:ext cx="1627464" cy="923330"/>
           </a:xfrm>
           <a:prstGeom prst="rect">
@@ -3551,21 +3584,21 @@
         </p:nvSpPr>
         <p:spPr>
           <a:xfrm>
-            <a:off x="834383" y="2967497"/>
-            <a:ext cx="8494633" cy="923330"/>
+            <a:off x="1253834" y="2682271"/>
+            <a:ext cx="10364919" cy="1569660"/>
           </a:xfrm>
           <a:prstGeom prst="rect">
             <a:avLst/>
           </a:prstGeom>
         </p:spPr>
         <p:txBody>
-          <a:bodyPr wrap="none">
+          <a:bodyPr wrap="square">
             <a:spAutoFit/>
           </a:bodyPr>
           <a:lstStyle/>
           <a:p>
             <a:r>
-              <a:rPr lang="ja-JP" altLang="en-US" b="1" dirty="0" smtClean="0">
+              <a:rPr lang="ja-JP" altLang="en-US" sz="2400" b="1" dirty="0" smtClean="0">
                 <a:solidFill>
                   <a:srgbClr val="0D0D0D"/>
                 </a:solidFill>
@@ -3574,24 +3607,15 @@
               <a:t>プレイヤー</a:t>
             </a:r>
             <a:r>
-              <a:rPr lang="ja-JP" altLang="en-US" b="1" dirty="0">
+              <a:rPr lang="ja-JP" altLang="en-US" sz="2400" b="1" dirty="0" smtClean="0">
                 <a:solidFill>
                   <a:srgbClr val="0D0D0D"/>
                 </a:solidFill>
                 <a:latin typeface="-apple-system-body"/>
               </a:rPr>
-              <a:t>は</a:t>
-            </a:r>
-            <a:r>
-              <a:rPr lang="ja-JP" altLang="en-US" b="1" dirty="0" smtClean="0">
-                <a:solidFill>
-                  <a:srgbClr val="0D0D0D"/>
-                </a:solidFill>
-                <a:latin typeface="-apple-system-body"/>
-              </a:rPr>
-              <a:t>感情を出すことが。</a:t>
-            </a:r>
-            <a:endParaRPr lang="en-US" altLang="ja-JP" b="1" dirty="0" smtClean="0">
+              <a:t>は大人しく感情を表に出すことが苦手です。</a:t>
+            </a:r>
+            <a:endParaRPr lang="en-US" altLang="ja-JP" sz="2400" b="1" dirty="0" smtClean="0">
               <a:solidFill>
                 <a:srgbClr val="0D0D0D"/>
               </a:solidFill>
@@ -3600,16 +3624,16 @@
           </a:p>
           <a:p>
             <a:r>
-              <a:rPr lang="ja-JP" altLang="en-US" b="1" i="0" dirty="0" smtClean="0">
+              <a:rPr lang="ja-JP" altLang="en-US" sz="2400" b="1" i="0" dirty="0" smtClean="0">
                 <a:solidFill>
                   <a:srgbClr val="0D0D0D"/>
                 </a:solidFill>
                 <a:effectLst/>
                 <a:latin typeface="-apple-system-body"/>
               </a:rPr>
-              <a:t>感情を取り戻すためにプレイヤーの脳にプレイヤー自身が意識を送りこみます。</a:t>
-            </a:r>
-            <a:endParaRPr lang="en-US" altLang="ja-JP" b="1" i="0" dirty="0" smtClean="0">
+              <a:t>ある日、お宝が洞窟に隠されていると知ります。</a:t>
+            </a:r>
+            <a:endParaRPr lang="en-US" altLang="ja-JP" sz="2400" b="1" i="0" dirty="0" smtClean="0">
               <a:solidFill>
                 <a:srgbClr val="0D0D0D"/>
               </a:solidFill>
@@ -3619,10 +3643,38 @@
           </a:p>
           <a:p>
             <a:r>
-              <a:rPr lang="ja-JP" altLang="en-US" b="1" dirty="0" smtClean="0"/>
-              <a:t>複数の試練を乗り越え徐々に感情を取り戻していきます。</a:t>
-            </a:r>
-            <a:endParaRPr lang="ja-JP" altLang="en-US" b="1" dirty="0"/>
+              <a:rPr lang="ja-JP" altLang="en-US" sz="2400" b="1" dirty="0">
+                <a:solidFill>
+                  <a:srgbClr val="0D0D0D"/>
+                </a:solidFill>
+                <a:latin typeface="-apple-system-body"/>
+              </a:rPr>
+              <a:t>そして</a:t>
+            </a:r>
+            <a:r>
+              <a:rPr lang="ja-JP" altLang="en-US" sz="2400" b="1" i="0" dirty="0" smtClean="0">
+                <a:solidFill>
+                  <a:srgbClr val="0D0D0D"/>
+                </a:solidFill>
+                <a:effectLst/>
+                <a:latin typeface="-apple-system-body"/>
+              </a:rPr>
+              <a:t>なんとそのお宝に触れると自分が願うものを手にすることができる。</a:t>
+            </a:r>
+            <a:endParaRPr lang="en-US" altLang="ja-JP" sz="2400" b="1" i="0" dirty="0" smtClean="0">
+              <a:solidFill>
+                <a:srgbClr val="0D0D0D"/>
+              </a:solidFill>
+              <a:effectLst/>
+              <a:latin typeface="-apple-system-body"/>
+            </a:endParaRPr>
+          </a:p>
+          <a:p>
+            <a:r>
+              <a:rPr lang="ja-JP" altLang="en-US" sz="2400" b="1" dirty="0" smtClean="0"/>
+              <a:t>そこでプレイヤーはそのお宝を見つけるべく洞窟に探索に行きます。</a:t>
+            </a:r>
+            <a:endParaRPr lang="ja-JP" altLang="en-US" sz="2400" b="1" dirty="0"/>
           </a:p>
         </p:txBody>
       </p:sp>
@@ -3664,8 +3716,8 @@
         </p:nvSpPr>
         <p:spPr>
           <a:xfrm>
-            <a:off x="4791322" y="1239365"/>
-            <a:ext cx="1533977" cy="830997"/>
+            <a:off x="4984268" y="1340034"/>
+            <a:ext cx="1567534" cy="923330"/>
           </a:xfrm>
           <a:prstGeom prst="rect">
             <a:avLst/>
@@ -3677,10 +3729,112 @@
           </a:bodyPr>
           <a:lstStyle/>
           <a:p>
-            <a:r>
-              <a:rPr lang="ja-JP" altLang="en-US" sz="4800" b="1" dirty="0"/>
-              <a:t>概要</a:t>
-            </a:r>
+            <a:pPr algn="ctr"/>
+            <a:r>
+              <a:rPr lang="ja-JP" altLang="en-US" sz="5400" b="1" dirty="0"/>
+              <a:t>内容</a:t>
+            </a:r>
+            <a:endParaRPr lang="ja-JP" altLang="en-US" sz="5400" b="1" dirty="0"/>
+          </a:p>
+        </p:txBody>
+      </p:sp>
+      <p:sp>
+        <p:nvSpPr>
+          <p:cNvPr id="3" name="テキスト ボックス 2"/>
+          <p:cNvSpPr txBox="1"/>
+          <p:nvPr/>
+        </p:nvSpPr>
+        <p:spPr>
+          <a:xfrm>
+            <a:off x="1061206" y="2541864"/>
+            <a:ext cx="10616270" cy="2031325"/>
+          </a:xfrm>
+          <a:prstGeom prst="rect">
+            <a:avLst/>
+          </a:prstGeom>
+          <a:noFill/>
+        </p:spPr>
+        <p:txBody>
+          <a:bodyPr wrap="square" rtlCol="0">
+            <a:spAutoFit/>
+          </a:bodyPr>
+          <a:lstStyle/>
+          <a:p>
+            <a:r>
+              <a:rPr kumimoji="1" lang="ja-JP" altLang="en-US" b="1" dirty="0" smtClean="0"/>
+              <a:t>始めプレイヤーは移動しかできません。</a:t>
+            </a:r>
+            <a:endParaRPr kumimoji="1" lang="en-US" altLang="ja-JP" b="1" dirty="0" smtClean="0"/>
+          </a:p>
+          <a:p>
+            <a:r>
+              <a:rPr kumimoji="1" lang="ja-JP" altLang="en-US" b="1" dirty="0" smtClean="0"/>
+              <a:t>洞窟は複数存在して</a:t>
+            </a:r>
+            <a:r>
+              <a:rPr lang="ja-JP" altLang="en-US" b="1" dirty="0" smtClean="0"/>
+              <a:t>おり最深部まで行くとお宝をゲットすることが出来ます。</a:t>
+            </a:r>
+            <a:endParaRPr kumimoji="1" lang="en-US" altLang="ja-JP" b="1" dirty="0" smtClean="0"/>
+          </a:p>
+          <a:p>
+            <a:r>
+              <a:rPr kumimoji="1" lang="ja-JP" altLang="en-US" b="1" dirty="0" smtClean="0"/>
+              <a:t>お宝をゲットすることで１つ願いを</a:t>
+            </a:r>
+            <a:r>
+              <a:rPr lang="ja-JP" altLang="en-US" b="1" dirty="0" smtClean="0"/>
+              <a:t>叶えることが出来ます。</a:t>
+            </a:r>
+            <a:endParaRPr lang="en-US" altLang="ja-JP" b="1" dirty="0" smtClean="0"/>
+          </a:p>
+          <a:p>
+            <a:r>
+              <a:rPr lang="ja-JP" altLang="en-US" b="1" dirty="0" smtClean="0"/>
+              <a:t>そこで１つの願いに付き１つの感情を</a:t>
+            </a:r>
+            <a:r>
+              <a:rPr lang="ja-JP" altLang="en-US" b="1" dirty="0"/>
+              <a:t>表</a:t>
+            </a:r>
+            <a:r>
+              <a:rPr lang="ja-JP" altLang="en-US" b="1" dirty="0" smtClean="0"/>
+              <a:t>に出</a:t>
+            </a:r>
+            <a:r>
+              <a:rPr kumimoji="1" lang="ja-JP" altLang="en-US" b="1" dirty="0" smtClean="0"/>
+              <a:t>することが出来ます。</a:t>
+            </a:r>
+            <a:endParaRPr kumimoji="1" lang="en-US" altLang="ja-JP" b="1" dirty="0" smtClean="0"/>
+          </a:p>
+          <a:p>
+            <a:r>
+              <a:rPr lang="ja-JP" altLang="en-US" b="1" dirty="0"/>
+              <a:t>その願</a:t>
+            </a:r>
+            <a:r>
+              <a:rPr lang="ja-JP" altLang="en-US" b="1" dirty="0" smtClean="0"/>
+              <a:t>いで得た感情には少し特殊で、各</a:t>
+            </a:r>
+            <a:r>
+              <a:rPr kumimoji="1" lang="ja-JP" altLang="en-US" b="1" dirty="0" smtClean="0"/>
+              <a:t>感情に異なる能力を目覚めさすことが出来るようになります。</a:t>
+            </a:r>
+            <a:endParaRPr kumimoji="1" lang="en-US" altLang="ja-JP" b="1" dirty="0" smtClean="0"/>
+          </a:p>
+          <a:p>
+            <a:r>
+              <a:rPr lang="ja-JP" altLang="en-US" b="1" dirty="0" smtClean="0"/>
+              <a:t>しかし一斉に異なる感情の能力は使うことはできず表に出している感情の能力しか使うことできない。</a:t>
+            </a:r>
+            <a:endParaRPr lang="en-US" altLang="ja-JP" b="1" dirty="0" smtClean="0"/>
+          </a:p>
+          <a:p>
+            <a:r>
+              <a:rPr kumimoji="1" lang="ja-JP" altLang="en-US" b="1" dirty="0" smtClean="0"/>
+              <a:t>それらの能力を使いすべての感情を取り戻すことができるのか。</a:t>
+            </a:r>
+            <a:endParaRPr kumimoji="1" lang="ja-JP" altLang="en-US" b="1" dirty="0"/>
           </a:p>
         </p:txBody>
       </p:sp>
@@ -3688,6 +3842,156 @@
     <p:extLst>
       <p:ext uri="{BB962C8B-B14F-4D97-AF65-F5344CB8AC3E}">
         <p14:creationId xmlns:p14="http://schemas.microsoft.com/office/powerpoint/2010/main" val="3138496890"/>
+      </p:ext>
+    </p:extLst>
+  </p:cSld>
+  <p:clrMapOvr>
+    <a:masterClrMapping/>
+  </p:clrMapOvr>
+</p:sld>
+</file>
+
+<file path=ppt/slides/slide5.xml><?xml version="1.0" encoding="utf-8"?>
+<p:sld xmlns:a="http://schemas.openxmlformats.org/drawingml/2006/main" xmlns:r="http://schemas.openxmlformats.org/officeDocument/2006/relationships" xmlns:p="http://schemas.openxmlformats.org/presentationml/2006/main">
+  <p:cSld>
+    <p:spTree>
+      <p:nvGrpSpPr>
+        <p:cNvPr id="1" name=""/>
+        <p:cNvGrpSpPr/>
+        <p:nvPr/>
+      </p:nvGrpSpPr>
+      <p:grpSpPr>
+        <a:xfrm>
+          <a:off x="0" y="0"/>
+          <a:ext cx="0" cy="0"/>
+          <a:chOff x="0" y="0"/>
+          <a:chExt cx="0" cy="0"/>
+        </a:xfrm>
+      </p:grpSpPr>
+      <p:sp>
+        <p:nvSpPr>
+          <p:cNvPr id="2" name="テキスト ボックス 1"/>
+          <p:cNvSpPr txBox="1"/>
+          <p:nvPr/>
+        </p:nvSpPr>
+        <p:spPr>
+          <a:xfrm>
+            <a:off x="5176008" y="1073791"/>
+            <a:ext cx="1367405" cy="769441"/>
+          </a:xfrm>
+          <a:prstGeom prst="rect">
+            <a:avLst/>
+          </a:prstGeom>
+          <a:noFill/>
+        </p:spPr>
+        <p:txBody>
+          <a:bodyPr wrap="square" rtlCol="0">
+            <a:spAutoFit/>
+          </a:bodyPr>
+          <a:lstStyle/>
+          <a:p>
+            <a:r>
+              <a:rPr kumimoji="1" lang="ja-JP" altLang="en-US" sz="4400" b="1" dirty="0" smtClean="0"/>
+              <a:t>感情</a:t>
+            </a:r>
+            <a:endParaRPr kumimoji="1" lang="ja-JP" altLang="en-US" sz="4400" b="1" dirty="0"/>
+          </a:p>
+        </p:txBody>
+      </p:sp>
+      <p:sp>
+        <p:nvSpPr>
+          <p:cNvPr id="3" name="テキスト ボックス 2"/>
+          <p:cNvSpPr txBox="1"/>
+          <p:nvPr/>
+        </p:nvSpPr>
+        <p:spPr>
+          <a:xfrm>
+            <a:off x="1635853" y="2231472"/>
+            <a:ext cx="2004969" cy="369332"/>
+          </a:xfrm>
+          <a:prstGeom prst="rect">
+            <a:avLst/>
+          </a:prstGeom>
+          <a:noFill/>
+        </p:spPr>
+        <p:txBody>
+          <a:bodyPr wrap="square" rtlCol="0">
+            <a:spAutoFit/>
+          </a:bodyPr>
+          <a:lstStyle/>
+          <a:p>
+            <a:r>
+              <a:rPr kumimoji="1" lang="ja-JP" altLang="en-US" dirty="0" smtClean="0"/>
+              <a:t>感情はすべて</a:t>
+            </a:r>
+            <a:endParaRPr kumimoji="1" lang="ja-JP" altLang="en-US" dirty="0"/>
+          </a:p>
+        </p:txBody>
+      </p:sp>
+    </p:spTree>
+    <p:extLst>
+      <p:ext uri="{BB962C8B-B14F-4D97-AF65-F5344CB8AC3E}">
+        <p14:creationId xmlns:p14="http://schemas.microsoft.com/office/powerpoint/2010/main" val="841516962"/>
+      </p:ext>
+    </p:extLst>
+  </p:cSld>
+  <p:clrMapOvr>
+    <a:masterClrMapping/>
+  </p:clrMapOvr>
+</p:sld>
+</file>
+
+<file path=ppt/slides/slide6.xml><?xml version="1.0" encoding="utf-8"?>
+<p:sld xmlns:a="http://schemas.openxmlformats.org/drawingml/2006/main" xmlns:r="http://schemas.openxmlformats.org/officeDocument/2006/relationships" xmlns:p="http://schemas.openxmlformats.org/presentationml/2006/main">
+  <p:cSld>
+    <p:spTree>
+      <p:nvGrpSpPr>
+        <p:cNvPr id="1" name=""/>
+        <p:cNvGrpSpPr/>
+        <p:nvPr/>
+      </p:nvGrpSpPr>
+      <p:grpSpPr>
+        <a:xfrm>
+          <a:off x="0" y="0"/>
+          <a:ext cx="0" cy="0"/>
+          <a:chOff x="0" y="0"/>
+          <a:chExt cx="0" cy="0"/>
+        </a:xfrm>
+      </p:grpSpPr>
+    </p:spTree>
+    <p:extLst>
+      <p:ext uri="{BB962C8B-B14F-4D97-AF65-F5344CB8AC3E}">
+        <p14:creationId xmlns:p14="http://schemas.microsoft.com/office/powerpoint/2010/main" val="2901506423"/>
+      </p:ext>
+    </p:extLst>
+  </p:cSld>
+  <p:clrMapOvr>
+    <a:masterClrMapping/>
+  </p:clrMapOvr>
+</p:sld>
+</file>
+
+<file path=ppt/slides/slide7.xml><?xml version="1.0" encoding="utf-8"?>
+<p:sld xmlns:a="http://schemas.openxmlformats.org/drawingml/2006/main" xmlns:r="http://schemas.openxmlformats.org/officeDocument/2006/relationships" xmlns:p="http://schemas.openxmlformats.org/presentationml/2006/main">
+  <p:cSld>
+    <p:spTree>
+      <p:nvGrpSpPr>
+        <p:cNvPr id="1" name=""/>
+        <p:cNvGrpSpPr/>
+        <p:nvPr/>
+      </p:nvGrpSpPr>
+      <p:grpSpPr>
+        <a:xfrm>
+          <a:off x="0" y="0"/>
+          <a:ext cx="0" cy="0"/>
+          <a:chOff x="0" y="0"/>
+          <a:chExt cx="0" cy="0"/>
+        </a:xfrm>
+      </p:grpSpPr>
+    </p:spTree>
+    <p:extLst>
+      <p:ext uri="{BB962C8B-B14F-4D97-AF65-F5344CB8AC3E}">
+        <p14:creationId xmlns:p14="http://schemas.microsoft.com/office/powerpoint/2010/main" val="462273167"/>
       </p:ext>
     </p:extLst>
   </p:cSld>

--- a/企画書.pptx
+++ b/企画書.pptx
@@ -160,10 +160,9 @@
           </a:lstStyle>
           <a:p>
             <a:r>
-              <a:rPr kumimoji="1" lang="ja-JP" altLang="en-US" smtClean="0"/>
+              <a:rPr kumimoji="1" lang="ja-JP" altLang="en-US"/>
               <a:t>マスター タイトルの書式設定</a:t>
             </a:r>
-            <a:endParaRPr kumimoji="1" lang="ja-JP" altLang="en-US"/>
           </a:p>
         </p:txBody>
       </p:sp>
@@ -225,10 +224,9 @@
           </a:lstStyle>
           <a:p>
             <a:r>
-              <a:rPr kumimoji="1" lang="ja-JP" altLang="en-US" smtClean="0"/>
+              <a:rPr kumimoji="1" lang="ja-JP" altLang="en-US"/>
               <a:t>マスター サブタイトルの書式設定</a:t>
             </a:r>
-            <a:endParaRPr kumimoji="1" lang="ja-JP" altLang="en-US"/>
           </a:p>
         </p:txBody>
       </p:sp>
@@ -249,7 +247,7 @@
           <a:p>
             <a:fld id="{6F6CF71D-B4D1-4CE1-9D45-0F127AB837F9}" type="datetimeFigureOut">
               <a:rPr kumimoji="1" lang="ja-JP" altLang="en-US" smtClean="0"/>
-              <a:t>2026/10/15</a:t>
+              <a:t>2026/10/20</a:t>
             </a:fld>
             <a:endParaRPr kumimoji="1" lang="ja-JP" altLang="en-US"/>
           </a:p>
@@ -343,10 +341,9 @@
           <a:lstStyle/>
           <a:p>
             <a:r>
-              <a:rPr kumimoji="1" lang="ja-JP" altLang="en-US" smtClean="0"/>
+              <a:rPr kumimoji="1" lang="ja-JP" altLang="en-US"/>
               <a:t>マスター タイトルの書式設定</a:t>
             </a:r>
-            <a:endParaRPr kumimoji="1" lang="ja-JP" altLang="en-US"/>
           </a:p>
         </p:txBody>
       </p:sp>
@@ -367,70 +364,69 @@
           <a:p>
             <a:pPr lvl="0"/>
             <a:r>
-              <a:rPr kumimoji="1" lang="ja-JP" altLang="en-US" smtClean="0"/>
+              <a:rPr kumimoji="1" lang="ja-JP" altLang="en-US"/>
               <a:t>マスター テキストの書式設定</a:t>
             </a:r>
           </a:p>
           <a:p>
             <a:pPr lvl="1"/>
             <a:r>
-              <a:rPr kumimoji="1" lang="ja-JP" altLang="en-US" smtClean="0"/>
+              <a:rPr kumimoji="1" lang="ja-JP" altLang="en-US"/>
               <a:t>第 </a:t>
             </a:r>
             <a:r>
-              <a:rPr kumimoji="1" lang="en-US" altLang="ja-JP" smtClean="0"/>
+              <a:rPr kumimoji="1" lang="en-US" altLang="ja-JP"/>
               <a:t>2 </a:t>
             </a:r>
             <a:r>
-              <a:rPr kumimoji="1" lang="ja-JP" altLang="en-US" smtClean="0"/>
+              <a:rPr kumimoji="1" lang="ja-JP" altLang="en-US"/>
               <a:t>レベル</a:t>
             </a:r>
           </a:p>
           <a:p>
             <a:pPr lvl="2"/>
             <a:r>
-              <a:rPr kumimoji="1" lang="ja-JP" altLang="en-US" smtClean="0"/>
+              <a:rPr kumimoji="1" lang="ja-JP" altLang="en-US"/>
               <a:t>第 </a:t>
             </a:r>
             <a:r>
-              <a:rPr kumimoji="1" lang="en-US" altLang="ja-JP" smtClean="0"/>
+              <a:rPr kumimoji="1" lang="en-US" altLang="ja-JP"/>
               <a:t>3 </a:t>
             </a:r>
             <a:r>
-              <a:rPr kumimoji="1" lang="ja-JP" altLang="en-US" smtClean="0"/>
+              <a:rPr kumimoji="1" lang="ja-JP" altLang="en-US"/>
               <a:t>レベル</a:t>
             </a:r>
           </a:p>
           <a:p>
             <a:pPr lvl="3"/>
             <a:r>
-              <a:rPr kumimoji="1" lang="ja-JP" altLang="en-US" smtClean="0"/>
+              <a:rPr kumimoji="1" lang="ja-JP" altLang="en-US"/>
               <a:t>第 </a:t>
             </a:r>
             <a:r>
-              <a:rPr kumimoji="1" lang="en-US" altLang="ja-JP" smtClean="0"/>
+              <a:rPr kumimoji="1" lang="en-US" altLang="ja-JP"/>
               <a:t>4 </a:t>
             </a:r>
             <a:r>
-              <a:rPr kumimoji="1" lang="ja-JP" altLang="en-US" smtClean="0"/>
+              <a:rPr kumimoji="1" lang="ja-JP" altLang="en-US"/>
               <a:t>レベル</a:t>
             </a:r>
           </a:p>
           <a:p>
             <a:pPr lvl="4"/>
             <a:r>
-              <a:rPr kumimoji="1" lang="ja-JP" altLang="en-US" smtClean="0"/>
+              <a:rPr kumimoji="1" lang="ja-JP" altLang="en-US"/>
               <a:t>第 </a:t>
             </a:r>
             <a:r>
-              <a:rPr kumimoji="1" lang="en-US" altLang="ja-JP" smtClean="0"/>
+              <a:rPr kumimoji="1" lang="en-US" altLang="ja-JP"/>
               <a:t>5 </a:t>
             </a:r>
             <a:r>
-              <a:rPr kumimoji="1" lang="ja-JP" altLang="en-US" smtClean="0"/>
+              <a:rPr kumimoji="1" lang="ja-JP" altLang="en-US"/>
               <a:t>レベル</a:t>
             </a:r>
-            <a:endParaRPr kumimoji="1" lang="ja-JP" altLang="en-US"/>
           </a:p>
         </p:txBody>
       </p:sp>
@@ -451,7 +447,7 @@
           <a:p>
             <a:fld id="{6F6CF71D-B4D1-4CE1-9D45-0F127AB837F9}" type="datetimeFigureOut">
               <a:rPr kumimoji="1" lang="ja-JP" altLang="en-US" smtClean="0"/>
-              <a:t>2026/10/15</a:t>
+              <a:t>2026/10/20</a:t>
             </a:fld>
             <a:endParaRPr kumimoji="1" lang="ja-JP" altLang="en-US"/>
           </a:p>
@@ -550,10 +546,9 @@
           <a:lstStyle/>
           <a:p>
             <a:r>
-              <a:rPr kumimoji="1" lang="ja-JP" altLang="en-US" smtClean="0"/>
+              <a:rPr kumimoji="1" lang="ja-JP" altLang="en-US"/>
               <a:t>マスター タイトルの書式設定</a:t>
             </a:r>
-            <a:endParaRPr kumimoji="1" lang="ja-JP" altLang="en-US"/>
           </a:p>
         </p:txBody>
       </p:sp>
@@ -579,70 +574,69 @@
           <a:p>
             <a:pPr lvl="0"/>
             <a:r>
-              <a:rPr kumimoji="1" lang="ja-JP" altLang="en-US" smtClean="0"/>
+              <a:rPr kumimoji="1" lang="ja-JP" altLang="en-US"/>
               <a:t>マスター テキストの書式設定</a:t>
             </a:r>
           </a:p>
           <a:p>
             <a:pPr lvl="1"/>
             <a:r>
-              <a:rPr kumimoji="1" lang="ja-JP" altLang="en-US" smtClean="0"/>
+              <a:rPr kumimoji="1" lang="ja-JP" altLang="en-US"/>
               <a:t>第 </a:t>
             </a:r>
             <a:r>
-              <a:rPr kumimoji="1" lang="en-US" altLang="ja-JP" smtClean="0"/>
+              <a:rPr kumimoji="1" lang="en-US" altLang="ja-JP"/>
               <a:t>2 </a:t>
             </a:r>
             <a:r>
-              <a:rPr kumimoji="1" lang="ja-JP" altLang="en-US" smtClean="0"/>
+              <a:rPr kumimoji="1" lang="ja-JP" altLang="en-US"/>
               <a:t>レベル</a:t>
             </a:r>
           </a:p>
           <a:p>
             <a:pPr lvl="2"/>
             <a:r>
-              <a:rPr kumimoji="1" lang="ja-JP" altLang="en-US" smtClean="0"/>
+              <a:rPr kumimoji="1" lang="ja-JP" altLang="en-US"/>
               <a:t>第 </a:t>
             </a:r>
             <a:r>
-              <a:rPr kumimoji="1" lang="en-US" altLang="ja-JP" smtClean="0"/>
+              <a:rPr kumimoji="1" lang="en-US" altLang="ja-JP"/>
               <a:t>3 </a:t>
             </a:r>
             <a:r>
-              <a:rPr kumimoji="1" lang="ja-JP" altLang="en-US" smtClean="0"/>
+              <a:rPr kumimoji="1" lang="ja-JP" altLang="en-US"/>
               <a:t>レベル</a:t>
             </a:r>
           </a:p>
           <a:p>
             <a:pPr lvl="3"/>
             <a:r>
-              <a:rPr kumimoji="1" lang="ja-JP" altLang="en-US" smtClean="0"/>
+              <a:rPr kumimoji="1" lang="ja-JP" altLang="en-US"/>
               <a:t>第 </a:t>
             </a:r>
             <a:r>
-              <a:rPr kumimoji="1" lang="en-US" altLang="ja-JP" smtClean="0"/>
+              <a:rPr kumimoji="1" lang="en-US" altLang="ja-JP"/>
               <a:t>4 </a:t>
             </a:r>
             <a:r>
-              <a:rPr kumimoji="1" lang="ja-JP" altLang="en-US" smtClean="0"/>
+              <a:rPr kumimoji="1" lang="ja-JP" altLang="en-US"/>
               <a:t>レベル</a:t>
             </a:r>
           </a:p>
           <a:p>
             <a:pPr lvl="4"/>
             <a:r>
-              <a:rPr kumimoji="1" lang="ja-JP" altLang="en-US" smtClean="0"/>
+              <a:rPr kumimoji="1" lang="ja-JP" altLang="en-US"/>
               <a:t>第 </a:t>
             </a:r>
             <a:r>
-              <a:rPr kumimoji="1" lang="en-US" altLang="ja-JP" smtClean="0"/>
+              <a:rPr kumimoji="1" lang="en-US" altLang="ja-JP"/>
               <a:t>5 </a:t>
             </a:r>
             <a:r>
-              <a:rPr kumimoji="1" lang="ja-JP" altLang="en-US" smtClean="0"/>
+              <a:rPr kumimoji="1" lang="ja-JP" altLang="en-US"/>
               <a:t>レベル</a:t>
             </a:r>
-            <a:endParaRPr kumimoji="1" lang="ja-JP" altLang="en-US"/>
           </a:p>
         </p:txBody>
       </p:sp>
@@ -663,7 +657,7 @@
           <a:p>
             <a:fld id="{6F6CF71D-B4D1-4CE1-9D45-0F127AB837F9}" type="datetimeFigureOut">
               <a:rPr kumimoji="1" lang="ja-JP" altLang="en-US" smtClean="0"/>
-              <a:t>2026/10/15</a:t>
+              <a:t>2026/10/20</a:t>
             </a:fld>
             <a:endParaRPr kumimoji="1" lang="ja-JP" altLang="en-US"/>
           </a:p>
@@ -757,10 +751,9 @@
           <a:lstStyle/>
           <a:p>
             <a:r>
-              <a:rPr kumimoji="1" lang="ja-JP" altLang="en-US" smtClean="0"/>
+              <a:rPr kumimoji="1" lang="ja-JP" altLang="en-US"/>
               <a:t>マスター タイトルの書式設定</a:t>
             </a:r>
-            <a:endParaRPr kumimoji="1" lang="ja-JP" altLang="en-US"/>
           </a:p>
         </p:txBody>
       </p:sp>
@@ -781,70 +774,69 @@
           <a:p>
             <a:pPr lvl="0"/>
             <a:r>
-              <a:rPr kumimoji="1" lang="ja-JP" altLang="en-US" smtClean="0"/>
+              <a:rPr kumimoji="1" lang="ja-JP" altLang="en-US"/>
               <a:t>マスター テキストの書式設定</a:t>
             </a:r>
           </a:p>
           <a:p>
             <a:pPr lvl="1"/>
             <a:r>
-              <a:rPr kumimoji="1" lang="ja-JP" altLang="en-US" smtClean="0"/>
+              <a:rPr kumimoji="1" lang="ja-JP" altLang="en-US"/>
               <a:t>第 </a:t>
             </a:r>
             <a:r>
-              <a:rPr kumimoji="1" lang="en-US" altLang="ja-JP" smtClean="0"/>
+              <a:rPr kumimoji="1" lang="en-US" altLang="ja-JP"/>
               <a:t>2 </a:t>
             </a:r>
             <a:r>
-              <a:rPr kumimoji="1" lang="ja-JP" altLang="en-US" smtClean="0"/>
+              <a:rPr kumimoji="1" lang="ja-JP" altLang="en-US"/>
               <a:t>レベル</a:t>
             </a:r>
           </a:p>
           <a:p>
             <a:pPr lvl="2"/>
             <a:r>
-              <a:rPr kumimoji="1" lang="ja-JP" altLang="en-US" smtClean="0"/>
+              <a:rPr kumimoji="1" lang="ja-JP" altLang="en-US"/>
               <a:t>第 </a:t>
             </a:r>
             <a:r>
-              <a:rPr kumimoji="1" lang="en-US" altLang="ja-JP" smtClean="0"/>
+              <a:rPr kumimoji="1" lang="en-US" altLang="ja-JP"/>
               <a:t>3 </a:t>
             </a:r>
             <a:r>
-              <a:rPr kumimoji="1" lang="ja-JP" altLang="en-US" smtClean="0"/>
+              <a:rPr kumimoji="1" lang="ja-JP" altLang="en-US"/>
               <a:t>レベル</a:t>
             </a:r>
           </a:p>
           <a:p>
             <a:pPr lvl="3"/>
             <a:r>
-              <a:rPr kumimoji="1" lang="ja-JP" altLang="en-US" smtClean="0"/>
+              <a:rPr kumimoji="1" lang="ja-JP" altLang="en-US"/>
               <a:t>第 </a:t>
             </a:r>
             <a:r>
-              <a:rPr kumimoji="1" lang="en-US" altLang="ja-JP" smtClean="0"/>
+              <a:rPr kumimoji="1" lang="en-US" altLang="ja-JP"/>
               <a:t>4 </a:t>
             </a:r>
             <a:r>
-              <a:rPr kumimoji="1" lang="ja-JP" altLang="en-US" smtClean="0"/>
+              <a:rPr kumimoji="1" lang="ja-JP" altLang="en-US"/>
               <a:t>レベル</a:t>
             </a:r>
           </a:p>
           <a:p>
             <a:pPr lvl="4"/>
             <a:r>
-              <a:rPr kumimoji="1" lang="ja-JP" altLang="en-US" smtClean="0"/>
+              <a:rPr kumimoji="1" lang="ja-JP" altLang="en-US"/>
               <a:t>第 </a:t>
             </a:r>
             <a:r>
-              <a:rPr kumimoji="1" lang="en-US" altLang="ja-JP" smtClean="0"/>
+              <a:rPr kumimoji="1" lang="en-US" altLang="ja-JP"/>
               <a:t>5 </a:t>
             </a:r>
             <a:r>
-              <a:rPr kumimoji="1" lang="ja-JP" altLang="en-US" smtClean="0"/>
+              <a:rPr kumimoji="1" lang="ja-JP" altLang="en-US"/>
               <a:t>レベル</a:t>
             </a:r>
-            <a:endParaRPr kumimoji="1" lang="ja-JP" altLang="en-US"/>
           </a:p>
         </p:txBody>
       </p:sp>
@@ -865,7 +857,7 @@
           <a:p>
             <a:fld id="{6F6CF71D-B4D1-4CE1-9D45-0F127AB837F9}" type="datetimeFigureOut">
               <a:rPr kumimoji="1" lang="ja-JP" altLang="en-US" smtClean="0"/>
-              <a:t>2026/10/15</a:t>
+              <a:t>2026/10/20</a:t>
             </a:fld>
             <a:endParaRPr kumimoji="1" lang="ja-JP" altLang="en-US"/>
           </a:p>
@@ -968,10 +960,9 @@
           </a:lstStyle>
           <a:p>
             <a:r>
-              <a:rPr kumimoji="1" lang="ja-JP" altLang="en-US" smtClean="0"/>
+              <a:rPr kumimoji="1" lang="ja-JP" altLang="en-US"/>
               <a:t>マスター タイトルの書式設定</a:t>
             </a:r>
-            <a:endParaRPr kumimoji="1" lang="ja-JP" altLang="en-US"/>
           </a:p>
         </p:txBody>
       </p:sp>
@@ -1088,7 +1079,7 @@
           <a:p>
             <a:pPr lvl="0"/>
             <a:r>
-              <a:rPr kumimoji="1" lang="ja-JP" altLang="en-US" smtClean="0"/>
+              <a:rPr kumimoji="1" lang="ja-JP" altLang="en-US"/>
               <a:t>マスター テキストの書式設定</a:t>
             </a:r>
           </a:p>
@@ -1111,7 +1102,7 @@
           <a:p>
             <a:fld id="{6F6CF71D-B4D1-4CE1-9D45-0F127AB837F9}" type="datetimeFigureOut">
               <a:rPr kumimoji="1" lang="ja-JP" altLang="en-US" smtClean="0"/>
-              <a:t>2026/10/15</a:t>
+              <a:t>2026/10/20</a:t>
             </a:fld>
             <a:endParaRPr kumimoji="1" lang="ja-JP" altLang="en-US"/>
           </a:p>
@@ -1205,10 +1196,9 @@
           <a:lstStyle/>
           <a:p>
             <a:r>
-              <a:rPr kumimoji="1" lang="ja-JP" altLang="en-US" smtClean="0"/>
+              <a:rPr kumimoji="1" lang="ja-JP" altLang="en-US"/>
               <a:t>マスター タイトルの書式設定</a:t>
             </a:r>
-            <a:endParaRPr kumimoji="1" lang="ja-JP" altLang="en-US"/>
           </a:p>
         </p:txBody>
       </p:sp>
@@ -1234,70 +1224,69 @@
           <a:p>
             <a:pPr lvl="0"/>
             <a:r>
-              <a:rPr kumimoji="1" lang="ja-JP" altLang="en-US" smtClean="0"/>
+              <a:rPr kumimoji="1" lang="ja-JP" altLang="en-US"/>
               <a:t>マスター テキストの書式設定</a:t>
             </a:r>
           </a:p>
           <a:p>
             <a:pPr lvl="1"/>
             <a:r>
-              <a:rPr kumimoji="1" lang="ja-JP" altLang="en-US" smtClean="0"/>
+              <a:rPr kumimoji="1" lang="ja-JP" altLang="en-US"/>
               <a:t>第 </a:t>
             </a:r>
             <a:r>
-              <a:rPr kumimoji="1" lang="en-US" altLang="ja-JP" smtClean="0"/>
+              <a:rPr kumimoji="1" lang="en-US" altLang="ja-JP"/>
               <a:t>2 </a:t>
             </a:r>
             <a:r>
-              <a:rPr kumimoji="1" lang="ja-JP" altLang="en-US" smtClean="0"/>
+              <a:rPr kumimoji="1" lang="ja-JP" altLang="en-US"/>
               <a:t>レベル</a:t>
             </a:r>
           </a:p>
           <a:p>
             <a:pPr lvl="2"/>
             <a:r>
-              <a:rPr kumimoji="1" lang="ja-JP" altLang="en-US" smtClean="0"/>
+              <a:rPr kumimoji="1" lang="ja-JP" altLang="en-US"/>
               <a:t>第 </a:t>
             </a:r>
             <a:r>
-              <a:rPr kumimoji="1" lang="en-US" altLang="ja-JP" smtClean="0"/>
+              <a:rPr kumimoji="1" lang="en-US" altLang="ja-JP"/>
               <a:t>3 </a:t>
             </a:r>
             <a:r>
-              <a:rPr kumimoji="1" lang="ja-JP" altLang="en-US" smtClean="0"/>
+              <a:rPr kumimoji="1" lang="ja-JP" altLang="en-US"/>
               <a:t>レベル</a:t>
             </a:r>
           </a:p>
           <a:p>
             <a:pPr lvl="3"/>
             <a:r>
-              <a:rPr kumimoji="1" lang="ja-JP" altLang="en-US" smtClean="0"/>
+              <a:rPr kumimoji="1" lang="ja-JP" altLang="en-US"/>
               <a:t>第 </a:t>
             </a:r>
             <a:r>
-              <a:rPr kumimoji="1" lang="en-US" altLang="ja-JP" smtClean="0"/>
+              <a:rPr kumimoji="1" lang="en-US" altLang="ja-JP"/>
               <a:t>4 </a:t>
             </a:r>
             <a:r>
-              <a:rPr kumimoji="1" lang="ja-JP" altLang="en-US" smtClean="0"/>
+              <a:rPr kumimoji="1" lang="ja-JP" altLang="en-US"/>
               <a:t>レベル</a:t>
             </a:r>
           </a:p>
           <a:p>
             <a:pPr lvl="4"/>
             <a:r>
-              <a:rPr kumimoji="1" lang="ja-JP" altLang="en-US" smtClean="0"/>
+              <a:rPr kumimoji="1" lang="ja-JP" altLang="en-US"/>
               <a:t>第 </a:t>
             </a:r>
             <a:r>
-              <a:rPr kumimoji="1" lang="en-US" altLang="ja-JP" smtClean="0"/>
+              <a:rPr kumimoji="1" lang="en-US" altLang="ja-JP"/>
               <a:t>5 </a:t>
             </a:r>
             <a:r>
-              <a:rPr kumimoji="1" lang="ja-JP" altLang="en-US" smtClean="0"/>
+              <a:rPr kumimoji="1" lang="ja-JP" altLang="en-US"/>
               <a:t>レベル</a:t>
             </a:r>
-            <a:endParaRPr kumimoji="1" lang="ja-JP" altLang="en-US"/>
           </a:p>
         </p:txBody>
       </p:sp>
@@ -1323,70 +1312,69 @@
           <a:p>
             <a:pPr lvl="0"/>
             <a:r>
-              <a:rPr kumimoji="1" lang="ja-JP" altLang="en-US" smtClean="0"/>
+              <a:rPr kumimoji="1" lang="ja-JP" altLang="en-US"/>
               <a:t>マスター テキストの書式設定</a:t>
             </a:r>
           </a:p>
           <a:p>
             <a:pPr lvl="1"/>
             <a:r>
-              <a:rPr kumimoji="1" lang="ja-JP" altLang="en-US" smtClean="0"/>
+              <a:rPr kumimoji="1" lang="ja-JP" altLang="en-US"/>
               <a:t>第 </a:t>
             </a:r>
             <a:r>
-              <a:rPr kumimoji="1" lang="en-US" altLang="ja-JP" smtClean="0"/>
+              <a:rPr kumimoji="1" lang="en-US" altLang="ja-JP"/>
               <a:t>2 </a:t>
             </a:r>
             <a:r>
-              <a:rPr kumimoji="1" lang="ja-JP" altLang="en-US" smtClean="0"/>
+              <a:rPr kumimoji="1" lang="ja-JP" altLang="en-US"/>
               <a:t>レベル</a:t>
             </a:r>
           </a:p>
           <a:p>
             <a:pPr lvl="2"/>
             <a:r>
-              <a:rPr kumimoji="1" lang="ja-JP" altLang="en-US" smtClean="0"/>
+              <a:rPr kumimoji="1" lang="ja-JP" altLang="en-US"/>
               <a:t>第 </a:t>
             </a:r>
             <a:r>
-              <a:rPr kumimoji="1" lang="en-US" altLang="ja-JP" smtClean="0"/>
+              <a:rPr kumimoji="1" lang="en-US" altLang="ja-JP"/>
               <a:t>3 </a:t>
             </a:r>
             <a:r>
-              <a:rPr kumimoji="1" lang="ja-JP" altLang="en-US" smtClean="0"/>
+              <a:rPr kumimoji="1" lang="ja-JP" altLang="en-US"/>
               <a:t>レベル</a:t>
             </a:r>
           </a:p>
           <a:p>
             <a:pPr lvl="3"/>
             <a:r>
-              <a:rPr kumimoji="1" lang="ja-JP" altLang="en-US" smtClean="0"/>
+              <a:rPr kumimoji="1" lang="ja-JP" altLang="en-US"/>
               <a:t>第 </a:t>
             </a:r>
             <a:r>
-              <a:rPr kumimoji="1" lang="en-US" altLang="ja-JP" smtClean="0"/>
+              <a:rPr kumimoji="1" lang="en-US" altLang="ja-JP"/>
               <a:t>4 </a:t>
             </a:r>
             <a:r>
-              <a:rPr kumimoji="1" lang="ja-JP" altLang="en-US" smtClean="0"/>
+              <a:rPr kumimoji="1" lang="ja-JP" altLang="en-US"/>
               <a:t>レベル</a:t>
             </a:r>
           </a:p>
           <a:p>
             <a:pPr lvl="4"/>
             <a:r>
-              <a:rPr kumimoji="1" lang="ja-JP" altLang="en-US" smtClean="0"/>
+              <a:rPr kumimoji="1" lang="ja-JP" altLang="en-US"/>
               <a:t>第 </a:t>
             </a:r>
             <a:r>
-              <a:rPr kumimoji="1" lang="en-US" altLang="ja-JP" smtClean="0"/>
+              <a:rPr kumimoji="1" lang="en-US" altLang="ja-JP"/>
               <a:t>5 </a:t>
             </a:r>
             <a:r>
-              <a:rPr kumimoji="1" lang="ja-JP" altLang="en-US" smtClean="0"/>
+              <a:rPr kumimoji="1" lang="ja-JP" altLang="en-US"/>
               <a:t>レベル</a:t>
             </a:r>
-            <a:endParaRPr kumimoji="1" lang="ja-JP" altLang="en-US"/>
           </a:p>
         </p:txBody>
       </p:sp>
@@ -1407,7 +1395,7 @@
           <a:p>
             <a:fld id="{6F6CF71D-B4D1-4CE1-9D45-0F127AB837F9}" type="datetimeFigureOut">
               <a:rPr kumimoji="1" lang="ja-JP" altLang="en-US" smtClean="0"/>
-              <a:t>2026/10/15</a:t>
+              <a:t>2026/10/20</a:t>
             </a:fld>
             <a:endParaRPr kumimoji="1" lang="ja-JP" altLang="en-US"/>
           </a:p>
@@ -1506,10 +1494,9 @@
           <a:lstStyle/>
           <a:p>
             <a:r>
-              <a:rPr kumimoji="1" lang="ja-JP" altLang="en-US" smtClean="0"/>
+              <a:rPr kumimoji="1" lang="ja-JP" altLang="en-US"/>
               <a:t>マスター タイトルの書式設定</a:t>
             </a:r>
-            <a:endParaRPr kumimoji="1" lang="ja-JP" altLang="en-US"/>
           </a:p>
         </p:txBody>
       </p:sp>
@@ -1572,7 +1559,7 @@
           <a:p>
             <a:pPr lvl="0"/>
             <a:r>
-              <a:rPr kumimoji="1" lang="ja-JP" altLang="en-US" smtClean="0"/>
+              <a:rPr kumimoji="1" lang="ja-JP" altLang="en-US"/>
               <a:t>マスター テキストの書式設定</a:t>
             </a:r>
           </a:p>
@@ -1600,70 +1587,69 @@
           <a:p>
             <a:pPr lvl="0"/>
             <a:r>
-              <a:rPr kumimoji="1" lang="ja-JP" altLang="en-US" smtClean="0"/>
+              <a:rPr kumimoji="1" lang="ja-JP" altLang="en-US"/>
               <a:t>マスター テキストの書式設定</a:t>
             </a:r>
           </a:p>
           <a:p>
             <a:pPr lvl="1"/>
             <a:r>
-              <a:rPr kumimoji="1" lang="ja-JP" altLang="en-US" smtClean="0"/>
+              <a:rPr kumimoji="1" lang="ja-JP" altLang="en-US"/>
               <a:t>第 </a:t>
             </a:r>
             <a:r>
-              <a:rPr kumimoji="1" lang="en-US" altLang="ja-JP" smtClean="0"/>
+              <a:rPr kumimoji="1" lang="en-US" altLang="ja-JP"/>
               <a:t>2 </a:t>
             </a:r>
             <a:r>
-              <a:rPr kumimoji="1" lang="ja-JP" altLang="en-US" smtClean="0"/>
+              <a:rPr kumimoji="1" lang="ja-JP" altLang="en-US"/>
               <a:t>レベル</a:t>
             </a:r>
           </a:p>
           <a:p>
             <a:pPr lvl="2"/>
             <a:r>
-              <a:rPr kumimoji="1" lang="ja-JP" altLang="en-US" smtClean="0"/>
+              <a:rPr kumimoji="1" lang="ja-JP" altLang="en-US"/>
               <a:t>第 </a:t>
             </a:r>
             <a:r>
-              <a:rPr kumimoji="1" lang="en-US" altLang="ja-JP" smtClean="0"/>
+              <a:rPr kumimoji="1" lang="en-US" altLang="ja-JP"/>
               <a:t>3 </a:t>
             </a:r>
             <a:r>
-              <a:rPr kumimoji="1" lang="ja-JP" altLang="en-US" smtClean="0"/>
+              <a:rPr kumimoji="1" lang="ja-JP" altLang="en-US"/>
               <a:t>レベル</a:t>
             </a:r>
           </a:p>
           <a:p>
             <a:pPr lvl="3"/>
             <a:r>
-              <a:rPr kumimoji="1" lang="ja-JP" altLang="en-US" smtClean="0"/>
+              <a:rPr kumimoji="1" lang="ja-JP" altLang="en-US"/>
               <a:t>第 </a:t>
             </a:r>
             <a:r>
-              <a:rPr kumimoji="1" lang="en-US" altLang="ja-JP" smtClean="0"/>
+              <a:rPr kumimoji="1" lang="en-US" altLang="ja-JP"/>
               <a:t>4 </a:t>
             </a:r>
             <a:r>
-              <a:rPr kumimoji="1" lang="ja-JP" altLang="en-US" smtClean="0"/>
+              <a:rPr kumimoji="1" lang="ja-JP" altLang="en-US"/>
               <a:t>レベル</a:t>
             </a:r>
           </a:p>
           <a:p>
             <a:pPr lvl="4"/>
             <a:r>
-              <a:rPr kumimoji="1" lang="ja-JP" altLang="en-US" smtClean="0"/>
+              <a:rPr kumimoji="1" lang="ja-JP" altLang="en-US"/>
               <a:t>第 </a:t>
             </a:r>
             <a:r>
-              <a:rPr kumimoji="1" lang="en-US" altLang="ja-JP" smtClean="0"/>
+              <a:rPr kumimoji="1" lang="en-US" altLang="ja-JP"/>
               <a:t>5 </a:t>
             </a:r>
             <a:r>
-              <a:rPr kumimoji="1" lang="ja-JP" altLang="en-US" smtClean="0"/>
+              <a:rPr kumimoji="1" lang="ja-JP" altLang="en-US"/>
               <a:t>レベル</a:t>
             </a:r>
-            <a:endParaRPr kumimoji="1" lang="ja-JP" altLang="en-US"/>
           </a:p>
         </p:txBody>
       </p:sp>
@@ -1726,7 +1712,7 @@
           <a:p>
             <a:pPr lvl="0"/>
             <a:r>
-              <a:rPr kumimoji="1" lang="ja-JP" altLang="en-US" smtClean="0"/>
+              <a:rPr kumimoji="1" lang="ja-JP" altLang="en-US"/>
               <a:t>マスター テキストの書式設定</a:t>
             </a:r>
           </a:p>
@@ -1754,70 +1740,69 @@
           <a:p>
             <a:pPr lvl="0"/>
             <a:r>
-              <a:rPr kumimoji="1" lang="ja-JP" altLang="en-US" smtClean="0"/>
+              <a:rPr kumimoji="1" lang="ja-JP" altLang="en-US"/>
               <a:t>マスター テキストの書式設定</a:t>
             </a:r>
           </a:p>
           <a:p>
             <a:pPr lvl="1"/>
             <a:r>
-              <a:rPr kumimoji="1" lang="ja-JP" altLang="en-US" smtClean="0"/>
+              <a:rPr kumimoji="1" lang="ja-JP" altLang="en-US"/>
               <a:t>第 </a:t>
             </a:r>
             <a:r>
-              <a:rPr kumimoji="1" lang="en-US" altLang="ja-JP" smtClean="0"/>
+              <a:rPr kumimoji="1" lang="en-US" altLang="ja-JP"/>
               <a:t>2 </a:t>
             </a:r>
             <a:r>
-              <a:rPr kumimoji="1" lang="ja-JP" altLang="en-US" smtClean="0"/>
+              <a:rPr kumimoji="1" lang="ja-JP" altLang="en-US"/>
               <a:t>レベル</a:t>
             </a:r>
           </a:p>
           <a:p>
             <a:pPr lvl="2"/>
             <a:r>
-              <a:rPr kumimoji="1" lang="ja-JP" altLang="en-US" smtClean="0"/>
+              <a:rPr kumimoji="1" lang="ja-JP" altLang="en-US"/>
               <a:t>第 </a:t>
             </a:r>
             <a:r>
-              <a:rPr kumimoji="1" lang="en-US" altLang="ja-JP" smtClean="0"/>
+              <a:rPr kumimoji="1" lang="en-US" altLang="ja-JP"/>
               <a:t>3 </a:t>
             </a:r>
             <a:r>
-              <a:rPr kumimoji="1" lang="ja-JP" altLang="en-US" smtClean="0"/>
+              <a:rPr kumimoji="1" lang="ja-JP" altLang="en-US"/>
               <a:t>レベル</a:t>
             </a:r>
           </a:p>
           <a:p>
             <a:pPr lvl="3"/>
             <a:r>
-              <a:rPr kumimoji="1" lang="ja-JP" altLang="en-US" smtClean="0"/>
+              <a:rPr kumimoji="1" lang="ja-JP" altLang="en-US"/>
               <a:t>第 </a:t>
             </a:r>
             <a:r>
-              <a:rPr kumimoji="1" lang="en-US" altLang="ja-JP" smtClean="0"/>
+              <a:rPr kumimoji="1" lang="en-US" altLang="ja-JP"/>
               <a:t>4 </a:t>
             </a:r>
             <a:r>
-              <a:rPr kumimoji="1" lang="ja-JP" altLang="en-US" smtClean="0"/>
+              <a:rPr kumimoji="1" lang="ja-JP" altLang="en-US"/>
               <a:t>レベル</a:t>
             </a:r>
           </a:p>
           <a:p>
             <a:pPr lvl="4"/>
             <a:r>
-              <a:rPr kumimoji="1" lang="ja-JP" altLang="en-US" smtClean="0"/>
+              <a:rPr kumimoji="1" lang="ja-JP" altLang="en-US"/>
               <a:t>第 </a:t>
             </a:r>
             <a:r>
-              <a:rPr kumimoji="1" lang="en-US" altLang="ja-JP" smtClean="0"/>
+              <a:rPr kumimoji="1" lang="en-US" altLang="ja-JP"/>
               <a:t>5 </a:t>
             </a:r>
             <a:r>
-              <a:rPr kumimoji="1" lang="ja-JP" altLang="en-US" smtClean="0"/>
+              <a:rPr kumimoji="1" lang="ja-JP" altLang="en-US"/>
               <a:t>レベル</a:t>
             </a:r>
-            <a:endParaRPr kumimoji="1" lang="ja-JP" altLang="en-US"/>
           </a:p>
         </p:txBody>
       </p:sp>
@@ -1838,7 +1823,7 @@
           <a:p>
             <a:fld id="{6F6CF71D-B4D1-4CE1-9D45-0F127AB837F9}" type="datetimeFigureOut">
               <a:rPr kumimoji="1" lang="ja-JP" altLang="en-US" smtClean="0"/>
-              <a:t>2026/10/15</a:t>
+              <a:t>2026/10/20</a:t>
             </a:fld>
             <a:endParaRPr kumimoji="1" lang="ja-JP" altLang="en-US"/>
           </a:p>
@@ -1932,10 +1917,9 @@
           <a:lstStyle/>
           <a:p>
             <a:r>
-              <a:rPr kumimoji="1" lang="ja-JP" altLang="en-US" smtClean="0"/>
+              <a:rPr kumimoji="1" lang="ja-JP" altLang="en-US"/>
               <a:t>マスター タイトルの書式設定</a:t>
             </a:r>
-            <a:endParaRPr kumimoji="1" lang="ja-JP" altLang="en-US"/>
           </a:p>
         </p:txBody>
       </p:sp>
@@ -1956,7 +1940,7 @@
           <a:p>
             <a:fld id="{6F6CF71D-B4D1-4CE1-9D45-0F127AB837F9}" type="datetimeFigureOut">
               <a:rPr kumimoji="1" lang="ja-JP" altLang="en-US" smtClean="0"/>
-              <a:t>2026/10/15</a:t>
+              <a:t>2026/10/20</a:t>
             </a:fld>
             <a:endParaRPr kumimoji="1" lang="ja-JP" altLang="en-US"/>
           </a:p>
@@ -2051,7 +2035,7 @@
           <a:p>
             <a:fld id="{6F6CF71D-B4D1-4CE1-9D45-0F127AB837F9}" type="datetimeFigureOut">
               <a:rPr kumimoji="1" lang="ja-JP" altLang="en-US" smtClean="0"/>
-              <a:t>2026/10/15</a:t>
+              <a:t>2026/10/20</a:t>
             </a:fld>
             <a:endParaRPr kumimoji="1" lang="ja-JP" altLang="en-US"/>
           </a:p>
@@ -2154,10 +2138,9 @@
           </a:lstStyle>
           <a:p>
             <a:r>
-              <a:rPr kumimoji="1" lang="ja-JP" altLang="en-US" smtClean="0"/>
+              <a:rPr kumimoji="1" lang="ja-JP" altLang="en-US"/>
               <a:t>マスター タイトルの書式設定</a:t>
             </a:r>
-            <a:endParaRPr kumimoji="1" lang="ja-JP" altLang="en-US"/>
           </a:p>
         </p:txBody>
       </p:sp>
@@ -2211,70 +2194,69 @@
           <a:p>
             <a:pPr lvl="0"/>
             <a:r>
-              <a:rPr kumimoji="1" lang="ja-JP" altLang="en-US" smtClean="0"/>
+              <a:rPr kumimoji="1" lang="ja-JP" altLang="en-US"/>
               <a:t>マスター テキストの書式設定</a:t>
             </a:r>
           </a:p>
           <a:p>
             <a:pPr lvl="1"/>
             <a:r>
-              <a:rPr kumimoji="1" lang="ja-JP" altLang="en-US" smtClean="0"/>
+              <a:rPr kumimoji="1" lang="ja-JP" altLang="en-US"/>
               <a:t>第 </a:t>
             </a:r>
             <a:r>
-              <a:rPr kumimoji="1" lang="en-US" altLang="ja-JP" smtClean="0"/>
+              <a:rPr kumimoji="1" lang="en-US" altLang="ja-JP"/>
               <a:t>2 </a:t>
             </a:r>
             <a:r>
-              <a:rPr kumimoji="1" lang="ja-JP" altLang="en-US" smtClean="0"/>
+              <a:rPr kumimoji="1" lang="ja-JP" altLang="en-US"/>
               <a:t>レベル</a:t>
             </a:r>
           </a:p>
           <a:p>
             <a:pPr lvl="2"/>
             <a:r>
-              <a:rPr kumimoji="1" lang="ja-JP" altLang="en-US" smtClean="0"/>
+              <a:rPr kumimoji="1" lang="ja-JP" altLang="en-US"/>
               <a:t>第 </a:t>
             </a:r>
             <a:r>
-              <a:rPr kumimoji="1" lang="en-US" altLang="ja-JP" smtClean="0"/>
+              <a:rPr kumimoji="1" lang="en-US" altLang="ja-JP"/>
               <a:t>3 </a:t>
             </a:r>
             <a:r>
-              <a:rPr kumimoji="1" lang="ja-JP" altLang="en-US" smtClean="0"/>
+              <a:rPr kumimoji="1" lang="ja-JP" altLang="en-US"/>
               <a:t>レベル</a:t>
             </a:r>
           </a:p>
           <a:p>
             <a:pPr lvl="3"/>
             <a:r>
-              <a:rPr kumimoji="1" lang="ja-JP" altLang="en-US" smtClean="0"/>
+              <a:rPr kumimoji="1" lang="ja-JP" altLang="en-US"/>
               <a:t>第 </a:t>
             </a:r>
             <a:r>
-              <a:rPr kumimoji="1" lang="en-US" altLang="ja-JP" smtClean="0"/>
+              <a:rPr kumimoji="1" lang="en-US" altLang="ja-JP"/>
               <a:t>4 </a:t>
             </a:r>
             <a:r>
-              <a:rPr kumimoji="1" lang="ja-JP" altLang="en-US" smtClean="0"/>
+              <a:rPr kumimoji="1" lang="ja-JP" altLang="en-US"/>
               <a:t>レベル</a:t>
             </a:r>
           </a:p>
           <a:p>
             <a:pPr lvl="4"/>
             <a:r>
-              <a:rPr kumimoji="1" lang="ja-JP" altLang="en-US" smtClean="0"/>
+              <a:rPr kumimoji="1" lang="ja-JP" altLang="en-US"/>
               <a:t>第 </a:t>
             </a:r>
             <a:r>
-              <a:rPr kumimoji="1" lang="en-US" altLang="ja-JP" smtClean="0"/>
+              <a:rPr kumimoji="1" lang="en-US" altLang="ja-JP"/>
               <a:t>5 </a:t>
             </a:r>
             <a:r>
-              <a:rPr kumimoji="1" lang="ja-JP" altLang="en-US" smtClean="0"/>
+              <a:rPr kumimoji="1" lang="ja-JP" altLang="en-US"/>
               <a:t>レベル</a:t>
             </a:r>
-            <a:endParaRPr kumimoji="1" lang="ja-JP" altLang="en-US"/>
           </a:p>
         </p:txBody>
       </p:sp>
@@ -2337,7 +2319,7 @@
           <a:p>
             <a:pPr lvl="0"/>
             <a:r>
-              <a:rPr kumimoji="1" lang="ja-JP" altLang="en-US" smtClean="0"/>
+              <a:rPr kumimoji="1" lang="ja-JP" altLang="en-US"/>
               <a:t>マスター テキストの書式設定</a:t>
             </a:r>
           </a:p>
@@ -2360,7 +2342,7 @@
           <a:p>
             <a:fld id="{6F6CF71D-B4D1-4CE1-9D45-0F127AB837F9}" type="datetimeFigureOut">
               <a:rPr kumimoji="1" lang="ja-JP" altLang="en-US" smtClean="0"/>
-              <a:t>2026/10/15</a:t>
+              <a:t>2026/10/20</a:t>
             </a:fld>
             <a:endParaRPr kumimoji="1" lang="ja-JP" altLang="en-US"/>
           </a:p>
@@ -2463,10 +2445,9 @@
           </a:lstStyle>
           <a:p>
             <a:r>
-              <a:rPr kumimoji="1" lang="ja-JP" altLang="en-US" smtClean="0"/>
+              <a:rPr kumimoji="1" lang="ja-JP" altLang="en-US"/>
               <a:t>マスター タイトルの書式設定</a:t>
             </a:r>
-            <a:endParaRPr kumimoji="1" lang="ja-JP" altLang="en-US"/>
           </a:p>
         </p:txBody>
       </p:sp>
@@ -2590,7 +2571,7 @@
           <a:p>
             <a:pPr lvl="0"/>
             <a:r>
-              <a:rPr kumimoji="1" lang="ja-JP" altLang="en-US" smtClean="0"/>
+              <a:rPr kumimoji="1" lang="ja-JP" altLang="en-US"/>
               <a:t>マスター テキストの書式設定</a:t>
             </a:r>
           </a:p>
@@ -2613,7 +2594,7 @@
           <a:p>
             <a:fld id="{6F6CF71D-B4D1-4CE1-9D45-0F127AB837F9}" type="datetimeFigureOut">
               <a:rPr kumimoji="1" lang="ja-JP" altLang="en-US" smtClean="0"/>
-              <a:t>2026/10/15</a:t>
+              <a:t>2026/10/20</a:t>
             </a:fld>
             <a:endParaRPr kumimoji="1" lang="ja-JP" altLang="en-US"/>
           </a:p>
@@ -2722,10 +2703,9 @@
           <a:lstStyle/>
           <a:p>
             <a:r>
-              <a:rPr kumimoji="1" lang="ja-JP" altLang="en-US" smtClean="0"/>
+              <a:rPr kumimoji="1" lang="ja-JP" altLang="en-US"/>
               <a:t>マスター タイトルの書式設定</a:t>
             </a:r>
-            <a:endParaRPr kumimoji="1" lang="ja-JP" altLang="en-US"/>
           </a:p>
         </p:txBody>
       </p:sp>
@@ -2756,70 +2736,69 @@
           <a:p>
             <a:pPr lvl="0"/>
             <a:r>
-              <a:rPr kumimoji="1" lang="ja-JP" altLang="en-US" smtClean="0"/>
+              <a:rPr kumimoji="1" lang="ja-JP" altLang="en-US"/>
               <a:t>マスター テキストの書式設定</a:t>
             </a:r>
           </a:p>
           <a:p>
             <a:pPr lvl="1"/>
             <a:r>
-              <a:rPr kumimoji="1" lang="ja-JP" altLang="en-US" smtClean="0"/>
+              <a:rPr kumimoji="1" lang="ja-JP" altLang="en-US"/>
               <a:t>第 </a:t>
             </a:r>
             <a:r>
-              <a:rPr kumimoji="1" lang="en-US" altLang="ja-JP" smtClean="0"/>
+              <a:rPr kumimoji="1" lang="en-US" altLang="ja-JP"/>
               <a:t>2 </a:t>
             </a:r>
             <a:r>
-              <a:rPr kumimoji="1" lang="ja-JP" altLang="en-US" smtClean="0"/>
+              <a:rPr kumimoji="1" lang="ja-JP" altLang="en-US"/>
               <a:t>レベル</a:t>
             </a:r>
           </a:p>
           <a:p>
             <a:pPr lvl="2"/>
             <a:r>
-              <a:rPr kumimoji="1" lang="ja-JP" altLang="en-US" smtClean="0"/>
+              <a:rPr kumimoji="1" lang="ja-JP" altLang="en-US"/>
               <a:t>第 </a:t>
             </a:r>
             <a:r>
-              <a:rPr kumimoji="1" lang="en-US" altLang="ja-JP" smtClean="0"/>
+              <a:rPr kumimoji="1" lang="en-US" altLang="ja-JP"/>
               <a:t>3 </a:t>
             </a:r>
             <a:r>
-              <a:rPr kumimoji="1" lang="ja-JP" altLang="en-US" smtClean="0"/>
+              <a:rPr kumimoji="1" lang="ja-JP" altLang="en-US"/>
               <a:t>レベル</a:t>
             </a:r>
           </a:p>
           <a:p>
             <a:pPr lvl="3"/>
             <a:r>
-              <a:rPr kumimoji="1" lang="ja-JP" altLang="en-US" smtClean="0"/>
+              <a:rPr kumimoji="1" lang="ja-JP" altLang="en-US"/>
               <a:t>第 </a:t>
             </a:r>
             <a:r>
-              <a:rPr kumimoji="1" lang="en-US" altLang="ja-JP" smtClean="0"/>
+              <a:rPr kumimoji="1" lang="en-US" altLang="ja-JP"/>
               <a:t>4 </a:t>
             </a:r>
             <a:r>
-              <a:rPr kumimoji="1" lang="ja-JP" altLang="en-US" smtClean="0"/>
+              <a:rPr kumimoji="1" lang="ja-JP" altLang="en-US"/>
               <a:t>レベル</a:t>
             </a:r>
           </a:p>
           <a:p>
             <a:pPr lvl="4"/>
             <a:r>
-              <a:rPr kumimoji="1" lang="ja-JP" altLang="en-US" smtClean="0"/>
+              <a:rPr kumimoji="1" lang="ja-JP" altLang="en-US"/>
               <a:t>第 </a:t>
             </a:r>
             <a:r>
-              <a:rPr kumimoji="1" lang="en-US" altLang="ja-JP" smtClean="0"/>
+              <a:rPr kumimoji="1" lang="en-US" altLang="ja-JP"/>
               <a:t>5 </a:t>
             </a:r>
             <a:r>
-              <a:rPr kumimoji="1" lang="ja-JP" altLang="en-US" smtClean="0"/>
+              <a:rPr kumimoji="1" lang="ja-JP" altLang="en-US"/>
               <a:t>レベル</a:t>
             </a:r>
-            <a:endParaRPr kumimoji="1" lang="ja-JP" altLang="en-US"/>
           </a:p>
         </p:txBody>
       </p:sp>
@@ -2858,7 +2837,7 @@
           <a:p>
             <a:fld id="{6F6CF71D-B4D1-4CE1-9D45-0F127AB837F9}" type="datetimeFigureOut">
               <a:rPr kumimoji="1" lang="ja-JP" altLang="en-US" smtClean="0"/>
-              <a:t>2026/10/15</a:t>
+              <a:t>2026/10/20</a:t>
             </a:fld>
             <a:endParaRPr kumimoji="1" lang="ja-JP" altLang="en-US"/>
           </a:p>
@@ -3287,10 +3266,9 @@
           <a:p>
             <a:pPr algn="ctr"/>
             <a:r>
-              <a:rPr kumimoji="1" lang="ja-JP" altLang="en-US" sz="7200" b="1" dirty="0" smtClean="0"/>
+              <a:rPr kumimoji="1" lang="ja-JP" altLang="en-US" sz="7200" b="1" dirty="0"/>
               <a:t>企画書</a:t>
             </a:r>
-            <a:endParaRPr kumimoji="1" lang="ja-JP" altLang="en-US" sz="7200" b="1" dirty="0"/>
           </a:p>
         </p:txBody>
       </p:sp>
@@ -3317,16 +3295,12 @@
           <a:lstStyle/>
           <a:p>
             <a:r>
-              <a:rPr kumimoji="1" lang="ja-JP" altLang="en-US" sz="2800" b="1" dirty="0" smtClean="0"/>
+              <a:rPr kumimoji="1" lang="ja-JP" altLang="en-US" sz="2800" b="1" dirty="0"/>
               <a:t>タイトル</a:t>
             </a:r>
             <a:r>
-              <a:rPr lang="en-US" altLang="ja-JP" sz="2800" b="1" dirty="0" smtClean="0"/>
-              <a:t>:</a:t>
-            </a:r>
-            <a:r>
               <a:rPr lang="en-US" altLang="ja-JP" sz="2800" b="1" dirty="0"/>
-              <a:t>alter emotions</a:t>
+              <a:t>:alter emotions</a:t>
             </a:r>
             <a:endParaRPr kumimoji="1" lang="ja-JP" altLang="en-US" sz="2800" b="1" dirty="0"/>
           </a:p>
@@ -3355,10 +3329,9 @@
           <a:lstStyle/>
           <a:p>
             <a:r>
-              <a:rPr kumimoji="1" lang="ja-JP" altLang="en-US" dirty="0" smtClean="0"/>
+              <a:rPr kumimoji="1" lang="ja-JP" altLang="en-US" dirty="0"/>
               <a:t>オルターエモーション</a:t>
             </a:r>
-            <a:endParaRPr kumimoji="1" lang="ja-JP" altLang="en-US" dirty="0"/>
           </a:p>
         </p:txBody>
       </p:sp>
@@ -3415,7 +3388,7 @@
           <a:lstStyle/>
           <a:p>
             <a:r>
-              <a:rPr lang="en-US" altLang="ja-JP" sz="2400" b="1" dirty="0" smtClean="0"/>
+              <a:rPr lang="en-US" altLang="ja-JP" sz="2400" b="1" dirty="0"/>
               <a:t>3D</a:t>
             </a:r>
             <a:r>
@@ -3449,10 +3422,9 @@
           <a:lstStyle/>
           <a:p>
             <a:r>
-              <a:rPr kumimoji="1" lang="ja-JP" altLang="en-US" sz="2000" b="1" dirty="0" smtClean="0"/>
+              <a:rPr kumimoji="1" lang="ja-JP" altLang="en-US" sz="2000" b="1" dirty="0"/>
               <a:t>ジャンル</a:t>
             </a:r>
-            <a:endParaRPr kumimoji="1" lang="ja-JP" altLang="en-US" sz="2000" b="1" dirty="0"/>
           </a:p>
         </p:txBody>
       </p:sp>
@@ -3479,10 +3451,9 @@
           <a:lstStyle/>
           <a:p>
             <a:r>
-              <a:rPr kumimoji="1" lang="ja-JP" altLang="en-US" sz="2000" b="1" dirty="0" smtClean="0"/>
+              <a:rPr kumimoji="1" lang="ja-JP" altLang="en-US" sz="2000" b="1" dirty="0"/>
               <a:t>開発環境</a:t>
             </a:r>
-            <a:endParaRPr kumimoji="1" lang="ja-JP" altLang="en-US" sz="2000" b="1" dirty="0"/>
           </a:p>
         </p:txBody>
       </p:sp>
@@ -3509,7 +3480,7 @@
           <a:lstStyle/>
           <a:p>
             <a:r>
-              <a:rPr lang="en-US" altLang="ja-JP" sz="2400" b="1" dirty="0" smtClean="0"/>
+              <a:rPr lang="en-US" altLang="ja-JP" sz="2400" b="1" dirty="0"/>
               <a:t>Unreal Engine</a:t>
             </a:r>
             <a:endParaRPr kumimoji="1" lang="ja-JP" altLang="en-US" sz="2400" b="1" dirty="0"/>
@@ -3598,24 +3569,15 @@
           <a:lstStyle/>
           <a:p>
             <a:r>
-              <a:rPr lang="ja-JP" altLang="en-US" sz="2400" b="1" dirty="0" smtClean="0">
+              <a:rPr lang="ja-JP" altLang="en-US" sz="2400" b="1" dirty="0">
                 <a:solidFill>
                   <a:srgbClr val="0D0D0D"/>
                 </a:solidFill>
                 <a:latin typeface="-apple-system-body"/>
               </a:rPr>
-              <a:t>プレイヤー</a:t>
-            </a:r>
-            <a:r>
-              <a:rPr lang="ja-JP" altLang="en-US" sz="2400" b="1" dirty="0" smtClean="0">
-                <a:solidFill>
-                  <a:srgbClr val="0D0D0D"/>
-                </a:solidFill>
-                <a:latin typeface="-apple-system-body"/>
-              </a:rPr>
-              <a:t>は大人しく感情を表に出すことが苦手です。</a:t>
-            </a:r>
-            <a:endParaRPr lang="en-US" altLang="ja-JP" sz="2400" b="1" dirty="0" smtClean="0">
+              <a:t>プレイヤーは大人しく感情を表に出すことが苦手です。</a:t>
+            </a:r>
+            <a:endParaRPr lang="en-US" altLang="ja-JP" sz="2400" b="1" dirty="0">
               <a:solidFill>
                 <a:srgbClr val="0D0D0D"/>
               </a:solidFill>
@@ -3624,7 +3586,7 @@
           </a:p>
           <a:p>
             <a:r>
-              <a:rPr lang="ja-JP" altLang="en-US" sz="2400" b="1" i="0" dirty="0" smtClean="0">
+              <a:rPr lang="ja-JP" altLang="en-US" sz="2400" b="1" i="0" dirty="0">
                 <a:solidFill>
                   <a:srgbClr val="0D0D0D"/>
                 </a:solidFill>
@@ -3633,7 +3595,7 @@
               </a:rPr>
               <a:t>ある日、お宝が洞窟に隠されていると知ります。</a:t>
             </a:r>
-            <a:endParaRPr lang="en-US" altLang="ja-JP" sz="2400" b="1" i="0" dirty="0" smtClean="0">
+            <a:endParaRPr lang="en-US" altLang="ja-JP" sz="2400" b="1" i="0" dirty="0">
               <a:solidFill>
                 <a:srgbClr val="0D0D0D"/>
               </a:solidFill>
@@ -3652,7 +3614,7 @@
               <a:t>そして</a:t>
             </a:r>
             <a:r>
-              <a:rPr lang="ja-JP" altLang="en-US" sz="2400" b="1" i="0" dirty="0" smtClean="0">
+              <a:rPr lang="ja-JP" altLang="en-US" sz="2400" b="1" i="0" dirty="0">
                 <a:solidFill>
                   <a:srgbClr val="0D0D0D"/>
                 </a:solidFill>
@@ -3661,7 +3623,7 @@
               </a:rPr>
               <a:t>なんとそのお宝に触れると自分が願うものを手にすることができる。</a:t>
             </a:r>
-            <a:endParaRPr lang="en-US" altLang="ja-JP" sz="2400" b="1" i="0" dirty="0" smtClean="0">
+            <a:endParaRPr lang="en-US" altLang="ja-JP" sz="2400" b="1" i="0" dirty="0">
               <a:solidFill>
                 <a:srgbClr val="0D0D0D"/>
               </a:solidFill>
@@ -3671,10 +3633,9 @@
           </a:p>
           <a:p>
             <a:r>
-              <a:rPr lang="ja-JP" altLang="en-US" sz="2400" b="1" dirty="0" smtClean="0"/>
+              <a:rPr lang="ja-JP" altLang="en-US" sz="2400" b="1" dirty="0"/>
               <a:t>そこでプレイヤーはそのお宝を見つけるべく洞窟に探索に行きます。</a:t>
             </a:r>
-            <a:endParaRPr lang="ja-JP" altLang="en-US" sz="2400" b="1" dirty="0"/>
           </a:p>
         </p:txBody>
       </p:sp>
@@ -3734,7 +3695,6 @@
               <a:rPr lang="ja-JP" altLang="en-US" sz="5400" b="1" dirty="0"/>
               <a:t>内容</a:t>
             </a:r>
-            <a:endParaRPr lang="ja-JP" altLang="en-US" sz="5400" b="1" dirty="0"/>
           </a:p>
         </p:txBody>
       </p:sp>
@@ -3761,80 +3721,67 @@
           <a:lstStyle/>
           <a:p>
             <a:r>
-              <a:rPr kumimoji="1" lang="ja-JP" altLang="en-US" b="1" dirty="0" smtClean="0"/>
+              <a:rPr kumimoji="1" lang="ja-JP" altLang="en-US" b="1" dirty="0"/>
               <a:t>始めプレイヤーは移動しかできません。</a:t>
             </a:r>
-            <a:endParaRPr kumimoji="1" lang="en-US" altLang="ja-JP" b="1" dirty="0" smtClean="0"/>
-          </a:p>
-          <a:p>
-            <a:r>
-              <a:rPr kumimoji="1" lang="ja-JP" altLang="en-US" b="1" dirty="0" smtClean="0"/>
+            <a:endParaRPr kumimoji="1" lang="en-US" altLang="ja-JP" b="1" dirty="0"/>
+          </a:p>
+          <a:p>
+            <a:r>
+              <a:rPr kumimoji="1" lang="ja-JP" altLang="en-US" b="1" dirty="0"/>
               <a:t>洞窟は複数存在して</a:t>
             </a:r>
             <a:r>
-              <a:rPr lang="ja-JP" altLang="en-US" b="1" dirty="0" smtClean="0"/>
+              <a:rPr lang="ja-JP" altLang="en-US" b="1" dirty="0"/>
               <a:t>おり最深部まで行くとお宝をゲットすることが出来ます。</a:t>
             </a:r>
-            <a:endParaRPr kumimoji="1" lang="en-US" altLang="ja-JP" b="1" dirty="0" smtClean="0"/>
-          </a:p>
-          <a:p>
-            <a:r>
-              <a:rPr kumimoji="1" lang="ja-JP" altLang="en-US" b="1" dirty="0" smtClean="0"/>
+            <a:endParaRPr kumimoji="1" lang="en-US" altLang="ja-JP" b="1" dirty="0"/>
+          </a:p>
+          <a:p>
+            <a:r>
+              <a:rPr kumimoji="1" lang="ja-JP" altLang="en-US" b="1" dirty="0"/>
               <a:t>お宝をゲットすることで１つ願いを</a:t>
             </a:r>
             <a:r>
-              <a:rPr lang="ja-JP" altLang="en-US" b="1" dirty="0" smtClean="0"/>
+              <a:rPr lang="ja-JP" altLang="en-US" b="1" dirty="0"/>
               <a:t>叶えることが出来ます。</a:t>
             </a:r>
-            <a:endParaRPr lang="en-US" altLang="ja-JP" b="1" dirty="0" smtClean="0"/>
-          </a:p>
-          <a:p>
-            <a:r>
-              <a:rPr lang="ja-JP" altLang="en-US" b="1" dirty="0" smtClean="0"/>
-              <a:t>そこで１つの願いに付き１つの感情を</a:t>
-            </a:r>
+            <a:endParaRPr lang="en-US" altLang="ja-JP" b="1" dirty="0"/>
+          </a:p>
+          <a:p>
             <a:r>
               <a:rPr lang="ja-JP" altLang="en-US" b="1" dirty="0"/>
-              <a:t>表</a:t>
-            </a:r>
-            <a:r>
-              <a:rPr lang="ja-JP" altLang="en-US" b="1" dirty="0" smtClean="0"/>
-              <a:t>に出</a:t>
-            </a:r>
-            <a:r>
-              <a:rPr kumimoji="1" lang="ja-JP" altLang="en-US" b="1" dirty="0" smtClean="0"/>
+              <a:t>そこで１つの願いに付き１つの感情を表に出</a:t>
+            </a:r>
+            <a:r>
+              <a:rPr kumimoji="1" lang="ja-JP" altLang="en-US" b="1" dirty="0"/>
               <a:t>することが出来ます。</a:t>
             </a:r>
-            <a:endParaRPr kumimoji="1" lang="en-US" altLang="ja-JP" b="1" dirty="0" smtClean="0"/>
+            <a:endParaRPr kumimoji="1" lang="en-US" altLang="ja-JP" b="1" dirty="0"/>
           </a:p>
           <a:p>
             <a:r>
               <a:rPr lang="ja-JP" altLang="en-US" b="1" dirty="0"/>
-              <a:t>その願</a:t>
-            </a:r>
-            <a:r>
-              <a:rPr lang="ja-JP" altLang="en-US" b="1" dirty="0" smtClean="0"/>
-              <a:t>いで得た感情には少し特殊で、各</a:t>
-            </a:r>
-            <a:r>
-              <a:rPr kumimoji="1" lang="ja-JP" altLang="en-US" b="1" dirty="0" smtClean="0"/>
+              <a:t>その願いで得た感情には少し特殊で、各</a:t>
+            </a:r>
+            <a:r>
+              <a:rPr kumimoji="1" lang="ja-JP" altLang="en-US" b="1" dirty="0"/>
               <a:t>感情に異なる能力を目覚めさすことが出来るようになります。</a:t>
             </a:r>
-            <a:endParaRPr kumimoji="1" lang="en-US" altLang="ja-JP" b="1" dirty="0" smtClean="0"/>
-          </a:p>
-          <a:p>
-            <a:r>
-              <a:rPr lang="ja-JP" altLang="en-US" b="1" dirty="0" smtClean="0"/>
+            <a:endParaRPr kumimoji="1" lang="en-US" altLang="ja-JP" b="1" dirty="0"/>
+          </a:p>
+          <a:p>
+            <a:r>
+              <a:rPr lang="ja-JP" altLang="en-US" b="1" dirty="0"/>
               <a:t>しかし一斉に異なる感情の能力は使うことはできず表に出している感情の能力しか使うことできない。</a:t>
             </a:r>
-            <a:endParaRPr lang="en-US" altLang="ja-JP" b="1" dirty="0" smtClean="0"/>
-          </a:p>
-          <a:p>
-            <a:r>
-              <a:rPr kumimoji="1" lang="ja-JP" altLang="en-US" b="1" dirty="0" smtClean="0"/>
+            <a:endParaRPr lang="en-US" altLang="ja-JP" b="1" dirty="0"/>
+          </a:p>
+          <a:p>
+            <a:r>
+              <a:rPr kumimoji="1" lang="ja-JP" altLang="en-US" b="1" dirty="0"/>
               <a:t>それらの能力を使いすべての感情を取り戻すことができるのか。</a:t>
             </a:r>
-            <a:endParaRPr kumimoji="1" lang="ja-JP" altLang="en-US" b="1" dirty="0"/>
           </a:p>
         </p:txBody>
       </p:sp>
@@ -3891,10 +3838,9 @@
           <a:lstStyle/>
           <a:p>
             <a:r>
-              <a:rPr kumimoji="1" lang="ja-JP" altLang="en-US" sz="4400" b="1" dirty="0" smtClean="0"/>
+              <a:rPr kumimoji="1" lang="ja-JP" altLang="en-US" sz="4400" b="1" dirty="0"/>
               <a:t>感情</a:t>
             </a:r>
-            <a:endParaRPr kumimoji="1" lang="ja-JP" altLang="en-US" sz="4400" b="1" dirty="0"/>
           </a:p>
         </p:txBody>
       </p:sp>
@@ -3921,10 +3867,9 @@
           <a:lstStyle/>
           <a:p>
             <a:r>
-              <a:rPr kumimoji="1" lang="ja-JP" altLang="en-US" dirty="0" smtClean="0"/>
+              <a:rPr kumimoji="1" lang="ja-JP" altLang="en-US" dirty="0"/>
               <a:t>感情はすべて</a:t>
             </a:r>
-            <a:endParaRPr kumimoji="1" lang="ja-JP" altLang="en-US" dirty="0"/>
           </a:p>
         </p:txBody>
       </p:sp>

--- a/企画書.pptx
+++ b/企画書.pptx
@@ -3780,7 +3780,7 @@
           <a:p>
             <a:r>
               <a:rPr kumimoji="1" lang="ja-JP" altLang="en-US" b="1" dirty="0"/>
-              <a:t>それらの能力を使いすべての感情を取り戻すことができるのか。</a:t>
+              <a:t>それらの能力を使いすべての感情を取り戻す。</a:t>
             </a:r>
           </a:p>
         </p:txBody>
@@ -3823,7 +3823,7 @@
         </p:nvSpPr>
         <p:spPr>
           <a:xfrm>
-            <a:off x="5176008" y="1073791"/>
+            <a:off x="5230329" y="1137166"/>
             <a:ext cx="1367405" cy="769441"/>
           </a:xfrm>
           <a:prstGeom prst="rect">
@@ -3852,8 +3852,8 @@
         </p:nvSpPr>
         <p:spPr>
           <a:xfrm>
-            <a:off x="1635853" y="2231472"/>
-            <a:ext cx="2004969" cy="369332"/>
+            <a:off x="1059255" y="2523001"/>
+            <a:ext cx="4312273" cy="523220"/>
           </a:xfrm>
           <a:prstGeom prst="rect">
             <a:avLst/>
@@ -3867,9 +3867,101 @@
           <a:lstStyle/>
           <a:p>
             <a:r>
-              <a:rPr kumimoji="1" lang="ja-JP" altLang="en-US" dirty="0"/>
-              <a:t>感情はすべて</a:t>
-            </a:r>
+              <a:rPr kumimoji="1" lang="ja-JP" altLang="en-US" sz="2800" b="1" dirty="0"/>
+              <a:t>・感情は全部で８種類</a:t>
+            </a:r>
+            <a:endParaRPr kumimoji="1" lang="en-US" altLang="ja-JP" sz="2800" b="1" dirty="0"/>
+          </a:p>
+        </p:txBody>
+      </p:sp>
+      <p:sp>
+        <p:nvSpPr>
+          <p:cNvPr id="4" name="テキスト ボックス 3">
+            <a:extLst>
+              <a:ext uri="{FF2B5EF4-FFF2-40B4-BE49-F238E27FC236}">
+                <a16:creationId xmlns:a16="http://schemas.microsoft.com/office/drawing/2014/main" id="{9B73D713-1607-406F-AA15-CD3C7B61FA5A}"/>
+              </a:ext>
+            </a:extLst>
+          </p:cNvPr>
+          <p:cNvSpPr txBox="1"/>
+          <p:nvPr/>
+        </p:nvSpPr>
+        <p:spPr>
+          <a:xfrm>
+            <a:off x="1059255" y="3662615"/>
+            <a:ext cx="6916847" cy="523220"/>
+          </a:xfrm>
+          <a:prstGeom prst="rect">
+            <a:avLst/>
+          </a:prstGeom>
+          <a:noFill/>
+        </p:spPr>
+        <p:txBody>
+          <a:bodyPr wrap="square" rtlCol="0">
+            <a:spAutoFit/>
+          </a:bodyPr>
+          <a:lstStyle/>
+          <a:p>
+            <a:r>
+              <a:rPr kumimoji="1" lang="ja-JP" altLang="en-US" sz="2800" b="1" dirty="0"/>
+              <a:t>・それぞれの感情によって能力が異なる</a:t>
+            </a:r>
+          </a:p>
+        </p:txBody>
+      </p:sp>
+      <p:sp>
+        <p:nvSpPr>
+          <p:cNvPr id="5" name="テキスト ボックス 4">
+            <a:extLst>
+              <a:ext uri="{FF2B5EF4-FFF2-40B4-BE49-F238E27FC236}">
+                <a16:creationId xmlns:a16="http://schemas.microsoft.com/office/drawing/2014/main" id="{E695A995-3356-4D1F-2AA4-BE1E76FB6989}"/>
+              </a:ext>
+            </a:extLst>
+          </p:cNvPr>
+          <p:cNvSpPr txBox="1"/>
+          <p:nvPr/>
+        </p:nvSpPr>
+        <p:spPr>
+          <a:xfrm>
+            <a:off x="1059255" y="4802229"/>
+            <a:ext cx="9261696" cy="523220"/>
+          </a:xfrm>
+          <a:prstGeom prst="rect">
+            <a:avLst/>
+          </a:prstGeom>
+          <a:noFill/>
+        </p:spPr>
+        <p:txBody>
+          <a:bodyPr wrap="square" rtlCol="0">
+            <a:spAutoFit/>
+          </a:bodyPr>
+          <a:lstStyle/>
+          <a:p>
+            <a:r>
+              <a:rPr kumimoji="1" lang="ja-JP" altLang="en-US" sz="2800" b="1" dirty="0"/>
+              <a:t>・</a:t>
+            </a:r>
+            <a:r>
+              <a:rPr lang="ja-JP" altLang="en-US" sz="2800" b="1" dirty="0"/>
+              <a:t>能力</a:t>
+            </a:r>
+            <a:r>
+              <a:rPr kumimoji="1" lang="ja-JP" altLang="en-US" sz="2800" b="1" dirty="0"/>
+              <a:t>例</a:t>
+            </a:r>
+            <a:r>
+              <a:rPr kumimoji="1" lang="en-US" altLang="ja-JP" sz="2800" b="1" dirty="0"/>
+              <a:t>(</a:t>
+            </a:r>
+            <a:r>
+              <a:rPr kumimoji="1" lang="ja-JP" altLang="en-US" sz="2800" b="1" dirty="0"/>
+              <a:t>ジャンプ力上昇、水を操れる、攻撃ができる</a:t>
+            </a:r>
+            <a:r>
+              <a:rPr kumimoji="1" lang="en-US" altLang="ja-JP" sz="2800" b="1" dirty="0"/>
+              <a:t>)</a:t>
+            </a:r>
+            <a:endParaRPr kumimoji="1" lang="ja-JP" altLang="en-US" sz="2800" b="1" dirty="0"/>
           </a:p>
         </p:txBody>
       </p:sp>
@@ -3903,6 +3995,42 @@
           <a:chExt cx="0" cy="0"/>
         </a:xfrm>
       </p:grpSpPr>
+      <p:sp>
+        <p:nvSpPr>
+          <p:cNvPr id="2" name="テキスト ボックス 1">
+            <a:extLst>
+              <a:ext uri="{FF2B5EF4-FFF2-40B4-BE49-F238E27FC236}">
+                <a16:creationId xmlns:a16="http://schemas.microsoft.com/office/drawing/2014/main" id="{AB0ED0D1-0C23-A14C-4226-CB52670F25DC}"/>
+              </a:ext>
+            </a:extLst>
+          </p:cNvPr>
+          <p:cNvSpPr txBox="1"/>
+          <p:nvPr/>
+        </p:nvSpPr>
+        <p:spPr>
+          <a:xfrm>
+            <a:off x="5389830" y="1149790"/>
+            <a:ext cx="1412340" cy="830997"/>
+          </a:xfrm>
+          <a:prstGeom prst="rect">
+            <a:avLst/>
+          </a:prstGeom>
+          <a:noFill/>
+        </p:spPr>
+        <p:txBody>
+          <a:bodyPr wrap="square" rtlCol="0">
+            <a:spAutoFit/>
+          </a:bodyPr>
+          <a:lstStyle/>
+          <a:p>
+            <a:pPr algn="just"/>
+            <a:r>
+              <a:rPr kumimoji="1" lang="ja-JP" altLang="en-US" sz="4800" b="1" dirty="0"/>
+              <a:t>洞窟</a:t>
+            </a:r>
+          </a:p>
+        </p:txBody>
+      </p:sp>
     </p:spTree>
     <p:extLst>
       <p:ext uri="{BB962C8B-B14F-4D97-AF65-F5344CB8AC3E}">

--- a/企画書.pptx
+++ b/企画書.pptx
@@ -4031,6 +4031,81 @@
           </a:p>
         </p:txBody>
       </p:sp>
+      <p:sp>
+        <p:nvSpPr>
+          <p:cNvPr id="3" name="テキスト ボックス 2">
+            <a:extLst>
+              <a:ext uri="{FF2B5EF4-FFF2-40B4-BE49-F238E27FC236}">
+                <a16:creationId xmlns:a16="http://schemas.microsoft.com/office/drawing/2014/main" id="{0B4D1167-73B1-A82D-D7EB-B6AF267EB2B6}"/>
+              </a:ext>
+            </a:extLst>
+          </p:cNvPr>
+          <p:cNvSpPr txBox="1"/>
+          <p:nvPr/>
+        </p:nvSpPr>
+        <p:spPr>
+          <a:xfrm>
+            <a:off x="1610007" y="2580237"/>
+            <a:ext cx="8971986" cy="523220"/>
+          </a:xfrm>
+          <a:prstGeom prst="rect">
+            <a:avLst/>
+          </a:prstGeom>
+          <a:noFill/>
+        </p:spPr>
+        <p:txBody>
+          <a:bodyPr wrap="square" rtlCol="0">
+            <a:spAutoFit/>
+          </a:bodyPr>
+          <a:lstStyle/>
+          <a:p>
+            <a:r>
+              <a:rPr kumimoji="1" lang="ja-JP" altLang="en-US" sz="2800" b="1" dirty="0"/>
+              <a:t>・洞窟は複数あり、たまに同じ洞窟にお宝がある。</a:t>
+            </a:r>
+          </a:p>
+        </p:txBody>
+      </p:sp>
+      <p:sp>
+        <p:nvSpPr>
+          <p:cNvPr id="4" name="テキスト ボックス 3">
+            <a:extLst>
+              <a:ext uri="{FF2B5EF4-FFF2-40B4-BE49-F238E27FC236}">
+                <a16:creationId xmlns:a16="http://schemas.microsoft.com/office/drawing/2014/main" id="{933CCFDA-2573-9B2C-4D48-56898D54FFF9}"/>
+              </a:ext>
+            </a:extLst>
+          </p:cNvPr>
+          <p:cNvSpPr txBox="1"/>
+          <p:nvPr/>
+        </p:nvSpPr>
+        <p:spPr>
+          <a:xfrm>
+            <a:off x="1610007" y="3832428"/>
+            <a:ext cx="6735778" cy="523220"/>
+          </a:xfrm>
+          <a:prstGeom prst="rect">
+            <a:avLst/>
+          </a:prstGeom>
+          <a:noFill/>
+        </p:spPr>
+        <p:txBody>
+          <a:bodyPr wrap="square" rtlCol="0">
+            <a:spAutoFit/>
+          </a:bodyPr>
+          <a:lstStyle/>
+          <a:p>
+            <a:r>
+              <a:rPr kumimoji="1" lang="ja-JP" altLang="en-US" sz="2800" b="1" dirty="0"/>
+              <a:t>・色んなギミックがある例</a:t>
+            </a:r>
+            <a:r>
+              <a:rPr kumimoji="1" lang="en-US" altLang="ja-JP" sz="2800" b="1" dirty="0"/>
+              <a:t>()</a:t>
+            </a:r>
+            <a:endParaRPr kumimoji="1" lang="ja-JP" altLang="en-US" sz="2800" b="1" dirty="0"/>
+          </a:p>
+        </p:txBody>
+      </p:sp>
     </p:spTree>
     <p:extLst>
       <p:ext uri="{BB962C8B-B14F-4D97-AF65-F5344CB8AC3E}">

--- a/企画書.pptx
+++ b/企画書.pptx
@@ -11,7 +11,6 @@
     <p:sldId id="260" r:id="rId5"/>
     <p:sldId id="261" r:id="rId6"/>
     <p:sldId id="262" r:id="rId7"/>
-    <p:sldId id="263" r:id="rId8"/>
   </p:sldIdLst>
   <p:sldSz cx="12192000" cy="6858000"/>
   <p:notesSz cx="6858000" cy="9144000"/>
@@ -247,7 +246,7 @@
           <a:p>
             <a:fld id="{6F6CF71D-B4D1-4CE1-9D45-0F127AB837F9}" type="datetimeFigureOut">
               <a:rPr kumimoji="1" lang="ja-JP" altLang="en-US" smtClean="0"/>
-              <a:t>2026/10/20</a:t>
+              <a:t>2026/10/21</a:t>
             </a:fld>
             <a:endParaRPr kumimoji="1" lang="ja-JP" altLang="en-US"/>
           </a:p>
@@ -447,7 +446,7 @@
           <a:p>
             <a:fld id="{6F6CF71D-B4D1-4CE1-9D45-0F127AB837F9}" type="datetimeFigureOut">
               <a:rPr kumimoji="1" lang="ja-JP" altLang="en-US" smtClean="0"/>
-              <a:t>2026/10/20</a:t>
+              <a:t>2026/10/21</a:t>
             </a:fld>
             <a:endParaRPr kumimoji="1" lang="ja-JP" altLang="en-US"/>
           </a:p>
@@ -657,7 +656,7 @@
           <a:p>
             <a:fld id="{6F6CF71D-B4D1-4CE1-9D45-0F127AB837F9}" type="datetimeFigureOut">
               <a:rPr kumimoji="1" lang="ja-JP" altLang="en-US" smtClean="0"/>
-              <a:t>2026/10/20</a:t>
+              <a:t>2026/10/21</a:t>
             </a:fld>
             <a:endParaRPr kumimoji="1" lang="ja-JP" altLang="en-US"/>
           </a:p>
@@ -857,7 +856,7 @@
           <a:p>
             <a:fld id="{6F6CF71D-B4D1-4CE1-9D45-0F127AB837F9}" type="datetimeFigureOut">
               <a:rPr kumimoji="1" lang="ja-JP" altLang="en-US" smtClean="0"/>
-              <a:t>2026/10/20</a:t>
+              <a:t>2026/10/21</a:t>
             </a:fld>
             <a:endParaRPr kumimoji="1" lang="ja-JP" altLang="en-US"/>
           </a:p>
@@ -1102,7 +1101,7 @@
           <a:p>
             <a:fld id="{6F6CF71D-B4D1-4CE1-9D45-0F127AB837F9}" type="datetimeFigureOut">
               <a:rPr kumimoji="1" lang="ja-JP" altLang="en-US" smtClean="0"/>
-              <a:t>2026/10/20</a:t>
+              <a:t>2026/10/21</a:t>
             </a:fld>
             <a:endParaRPr kumimoji="1" lang="ja-JP" altLang="en-US"/>
           </a:p>
@@ -1395,7 +1394,7 @@
           <a:p>
             <a:fld id="{6F6CF71D-B4D1-4CE1-9D45-0F127AB837F9}" type="datetimeFigureOut">
               <a:rPr kumimoji="1" lang="ja-JP" altLang="en-US" smtClean="0"/>
-              <a:t>2026/10/20</a:t>
+              <a:t>2026/10/21</a:t>
             </a:fld>
             <a:endParaRPr kumimoji="1" lang="ja-JP" altLang="en-US"/>
           </a:p>
@@ -1823,7 +1822,7 @@
           <a:p>
             <a:fld id="{6F6CF71D-B4D1-4CE1-9D45-0F127AB837F9}" type="datetimeFigureOut">
               <a:rPr kumimoji="1" lang="ja-JP" altLang="en-US" smtClean="0"/>
-              <a:t>2026/10/20</a:t>
+              <a:t>2026/10/21</a:t>
             </a:fld>
             <a:endParaRPr kumimoji="1" lang="ja-JP" altLang="en-US"/>
           </a:p>
@@ -1940,7 +1939,7 @@
           <a:p>
             <a:fld id="{6F6CF71D-B4D1-4CE1-9D45-0F127AB837F9}" type="datetimeFigureOut">
               <a:rPr kumimoji="1" lang="ja-JP" altLang="en-US" smtClean="0"/>
-              <a:t>2026/10/20</a:t>
+              <a:t>2026/10/21</a:t>
             </a:fld>
             <a:endParaRPr kumimoji="1" lang="ja-JP" altLang="en-US"/>
           </a:p>
@@ -2035,7 +2034,7 @@
           <a:p>
             <a:fld id="{6F6CF71D-B4D1-4CE1-9D45-0F127AB837F9}" type="datetimeFigureOut">
               <a:rPr kumimoji="1" lang="ja-JP" altLang="en-US" smtClean="0"/>
-              <a:t>2026/10/20</a:t>
+              <a:t>2026/10/21</a:t>
             </a:fld>
             <a:endParaRPr kumimoji="1" lang="ja-JP" altLang="en-US"/>
           </a:p>
@@ -2342,7 +2341,7 @@
           <a:p>
             <a:fld id="{6F6CF71D-B4D1-4CE1-9D45-0F127AB837F9}" type="datetimeFigureOut">
               <a:rPr kumimoji="1" lang="ja-JP" altLang="en-US" smtClean="0"/>
-              <a:t>2026/10/20</a:t>
+              <a:t>2026/10/21</a:t>
             </a:fld>
             <a:endParaRPr kumimoji="1" lang="ja-JP" altLang="en-US"/>
           </a:p>
@@ -2594,7 +2593,7 @@
           <a:p>
             <a:fld id="{6F6CF71D-B4D1-4CE1-9D45-0F127AB837F9}" type="datetimeFigureOut">
               <a:rPr kumimoji="1" lang="ja-JP" altLang="en-US" smtClean="0"/>
-              <a:t>2026/10/20</a:t>
+              <a:t>2026/10/21</a:t>
             </a:fld>
             <a:endParaRPr kumimoji="1" lang="ja-JP" altLang="en-US"/>
           </a:p>
@@ -2837,7 +2836,7 @@
           <a:p>
             <a:fld id="{6F6CF71D-B4D1-4CE1-9D45-0F127AB837F9}" type="datetimeFigureOut">
               <a:rPr kumimoji="1" lang="ja-JP" altLang="en-US" smtClean="0"/>
-              <a:t>2026/10/20</a:t>
+              <a:t>2026/10/21</a:t>
             </a:fld>
             <a:endParaRPr kumimoji="1" lang="ja-JP" altLang="en-US"/>
           </a:p>
@@ -4096,11 +4095,11 @@
           <a:p>
             <a:r>
               <a:rPr kumimoji="1" lang="ja-JP" altLang="en-US" sz="2800" b="1" dirty="0"/>
-              <a:t>・色んなギミックがある例</a:t>
-            </a:r>
-            <a:r>
-              <a:rPr kumimoji="1" lang="en-US" altLang="ja-JP" sz="2800" b="1" dirty="0"/>
-              <a:t>()</a:t>
+              <a:t>・色んなギミックが</a:t>
+            </a:r>
+            <a:r>
+              <a:rPr kumimoji="1" lang="ja-JP" altLang="en-US" sz="2800" b="1" dirty="0" smtClean="0"/>
+              <a:t>ある</a:t>
             </a:r>
             <a:endParaRPr kumimoji="1" lang="ja-JP" altLang="en-US" sz="2800" b="1" dirty="0"/>
           </a:p>
@@ -4110,36 +4109,6 @@
     <p:extLst>
       <p:ext uri="{BB962C8B-B14F-4D97-AF65-F5344CB8AC3E}">
         <p14:creationId xmlns:p14="http://schemas.microsoft.com/office/powerpoint/2010/main" val="2901506423"/>
-      </p:ext>
-    </p:extLst>
-  </p:cSld>
-  <p:clrMapOvr>
-    <a:masterClrMapping/>
-  </p:clrMapOvr>
-</p:sld>
-</file>
-
-<file path=ppt/slides/slide7.xml><?xml version="1.0" encoding="utf-8"?>
-<p:sld xmlns:a="http://schemas.openxmlformats.org/drawingml/2006/main" xmlns:r="http://schemas.openxmlformats.org/officeDocument/2006/relationships" xmlns:p="http://schemas.openxmlformats.org/presentationml/2006/main">
-  <p:cSld>
-    <p:spTree>
-      <p:nvGrpSpPr>
-        <p:cNvPr id="1" name=""/>
-        <p:cNvGrpSpPr/>
-        <p:nvPr/>
-      </p:nvGrpSpPr>
-      <p:grpSpPr>
-        <a:xfrm>
-          <a:off x="0" y="0"/>
-          <a:ext cx="0" cy="0"/>
-          <a:chOff x="0" y="0"/>
-          <a:chExt cx="0" cy="0"/>
-        </a:xfrm>
-      </p:grpSpPr>
-    </p:spTree>
-    <p:extLst>
-      <p:ext uri="{BB962C8B-B14F-4D97-AF65-F5344CB8AC3E}">
-        <p14:creationId xmlns:p14="http://schemas.microsoft.com/office/powerpoint/2010/main" val="462273167"/>
       </p:ext>
     </p:extLst>
   </p:cSld>
